--- a/Präsentationen/Analyse1.pptx
+++ b/Präsentationen/Analyse1.pptx
@@ -5,17 +5,14 @@
     <p:sldMasterId id="2147483648" r:id="rId1"/>
   </p:sldMasterIdLst>
   <p:notesMasterIdLst>
-    <p:notesMasterId r:id="rId10"/>
+    <p:notesMasterId r:id="rId7"/>
   </p:notesMasterIdLst>
   <p:sldIdLst>
     <p:sldId id="261" r:id="rId2"/>
     <p:sldId id="257" r:id="rId3"/>
-    <p:sldId id="263" r:id="rId4"/>
-    <p:sldId id="262" r:id="rId5"/>
-    <p:sldId id="264" r:id="rId6"/>
-    <p:sldId id="265" r:id="rId7"/>
-    <p:sldId id="266" r:id="rId8"/>
-    <p:sldId id="267" r:id="rId9"/>
+    <p:sldId id="262" r:id="rId4"/>
+    <p:sldId id="266" r:id="rId5"/>
+    <p:sldId id="267" r:id="rId6"/>
   </p:sldIdLst>
   <p:sldSz cx="12192000" cy="6858000"/>
   <p:notesSz cx="6858000" cy="9144000"/>
@@ -154,7 +151,7 @@
             </a:pPr>
             <a:r>
               <a:rPr lang="de-DE" b="1" dirty="0"/>
-              <a:t>Arbeitsaufwand</a:t>
+              <a:t>Funktionen</a:t>
             </a:r>
           </a:p>
           <a:p>
@@ -1624,7 +1621,7 @@
           <a:p>
             <a:fld id="{581460B1-C373-42D6-934C-F2B8B8031C9D}" type="datetimeFigureOut">
               <a:rPr lang="de-DE" smtClean="0"/>
-              <a:t>18.03.2026</a:t>
+              <a:t>05.05.2026</a:t>
             </a:fld>
             <a:endParaRPr lang="de-DE"/>
           </a:p>
@@ -1987,127 +1984,6 @@
         <p:cNvPr id="1" name="">
           <a:extLst>
             <a:ext uri="{FF2B5EF4-FFF2-40B4-BE49-F238E27FC236}">
-              <a16:creationId xmlns:a16="http://schemas.microsoft.com/office/drawing/2014/main" id="{4B4FE0E0-DF21-13C9-B2DB-4152817347AD}"/>
-            </a:ext>
-          </a:extLst>
-        </p:cNvPr>
-        <p:cNvGrpSpPr/>
-        <p:nvPr/>
-      </p:nvGrpSpPr>
-      <p:grpSpPr>
-        <a:xfrm>
-          <a:off x="0" y="0"/>
-          <a:ext cx="0" cy="0"/>
-          <a:chOff x="0" y="0"/>
-          <a:chExt cx="0" cy="0"/>
-        </a:xfrm>
-      </p:grpSpPr>
-      <p:sp>
-        <p:nvSpPr>
-          <p:cNvPr id="2" name="Slide Image Placeholder 1">
-            <a:extLst>
-              <a:ext uri="{FF2B5EF4-FFF2-40B4-BE49-F238E27FC236}">
-                <a16:creationId xmlns:a16="http://schemas.microsoft.com/office/drawing/2014/main" id="{160C0443-ED1D-64F9-4407-2A0947F0A8D5}"/>
-              </a:ext>
-            </a:extLst>
-          </p:cNvPr>
-          <p:cNvSpPr>
-            <a:spLocks noGrp="1" noRot="1" noChangeAspect="1"/>
-          </p:cNvSpPr>
-          <p:nvPr>
-            <p:ph type="sldImg"/>
-          </p:nvPr>
-        </p:nvSpPr>
-        <p:spPr/>
-      </p:sp>
-      <p:sp>
-        <p:nvSpPr>
-          <p:cNvPr id="3" name="Notes Placeholder 2">
-            <a:extLst>
-              <a:ext uri="{FF2B5EF4-FFF2-40B4-BE49-F238E27FC236}">
-                <a16:creationId xmlns:a16="http://schemas.microsoft.com/office/drawing/2014/main" id="{3BF27C9C-58BF-ED62-D097-A3529C762744}"/>
-              </a:ext>
-            </a:extLst>
-          </p:cNvPr>
-          <p:cNvSpPr>
-            <a:spLocks noGrp="1"/>
-          </p:cNvSpPr>
-          <p:nvPr>
-            <p:ph type="body" idx="1"/>
-          </p:nvPr>
-        </p:nvSpPr>
-        <p:spPr/>
-        <p:txBody>
-          <a:bodyPr/>
-          <a:lstStyle/>
-          <a:p>
-            <a:r>
-              <a:rPr lang="de-DE" dirty="0"/>
-              <a:t>Kleine Teaser für Demo</a:t>
-            </a:r>
-            <a:br>
-              <a:rPr lang="de-DE" dirty="0"/>
-            </a:br>
-            <a:br>
-              <a:rPr lang="de-DE" dirty="0"/>
-            </a:br>
-            <a:r>
-              <a:rPr lang="de-DE" dirty="0"/>
-              <a:t>ChatGBT 30 minuten</a:t>
-            </a:r>
-          </a:p>
-        </p:txBody>
-      </p:sp>
-      <p:sp>
-        <p:nvSpPr>
-          <p:cNvPr id="4" name="Slide Number Placeholder 3">
-            <a:extLst>
-              <a:ext uri="{FF2B5EF4-FFF2-40B4-BE49-F238E27FC236}">
-                <a16:creationId xmlns:a16="http://schemas.microsoft.com/office/drawing/2014/main" id="{BE629EF5-D64E-AA69-62F4-FB4FB356404A}"/>
-              </a:ext>
-            </a:extLst>
-          </p:cNvPr>
-          <p:cNvSpPr>
-            <a:spLocks noGrp="1"/>
-          </p:cNvSpPr>
-          <p:nvPr>
-            <p:ph type="sldNum" sz="quarter" idx="5"/>
-          </p:nvPr>
-        </p:nvSpPr>
-        <p:spPr/>
-        <p:txBody>
-          <a:bodyPr/>
-          <a:lstStyle/>
-          <a:p>
-            <a:fld id="{51BF6546-9EDD-4CCD-BFAA-B3D66A670733}" type="slidenum">
-              <a:rPr lang="de-DE" smtClean="0"/>
-              <a:t>3</a:t>
-            </a:fld>
-            <a:endParaRPr lang="de-DE"/>
-          </a:p>
-        </p:txBody>
-      </p:sp>
-    </p:spTree>
-    <p:extLst>
-      <p:ext uri="{BB962C8B-B14F-4D97-AF65-F5344CB8AC3E}">
-        <p14:creationId xmlns:p14="http://schemas.microsoft.com/office/powerpoint/2010/main" val="389052132"/>
-      </p:ext>
-    </p:extLst>
-  </p:cSld>
-  <p:clrMapOvr>
-    <a:masterClrMapping/>
-  </p:clrMapOvr>
-</p:notes>
-</file>
-
-<file path=ppt/notesSlides/notesSlide3.xml><?xml version="1.0" encoding="utf-8"?>
-<p:notes xmlns:a="http://schemas.openxmlformats.org/drawingml/2006/main" xmlns:r="http://schemas.openxmlformats.org/officeDocument/2006/relationships" xmlns:p="http://schemas.openxmlformats.org/presentationml/2006/main">
-  <p:cSld>
-    <p:spTree>
-      <p:nvGrpSpPr>
-        <p:cNvPr id="1" name="">
-          <a:extLst>
-            <a:ext uri="{FF2B5EF4-FFF2-40B4-BE49-F238E27FC236}">
               <a16:creationId xmlns:a16="http://schemas.microsoft.com/office/drawing/2014/main" id="{865FEAB4-3085-63E6-7743-F94EB0F67D16}"/>
             </a:ext>
           </a:extLst>
@@ -2180,152 +2056,98 @@
               <a:defRPr/>
             </a:pPr>
             <a:r>
-              <a:rPr lang="de-DE" sz="1200" dirty="0">
-                <a:solidFill>
-                  <a:schemeClr val="bg1">
-                    <a:lumMod val="85000"/>
-                  </a:schemeClr>
-                </a:solidFill>
-              </a:rPr>
-              <a:t>- 40h Arbeitsaufwand</a:t>
+              <a:rPr lang="de-DE" dirty="0"/>
+              <a:t>DLS-Server ist Black Box</a:t>
             </a:r>
-            <a:br>
-              <a:rPr lang="de-DE" sz="1200" dirty="0">
-                <a:solidFill>
-                  <a:schemeClr val="bg1">
-                    <a:lumMod val="85000"/>
-                  </a:schemeClr>
-                </a:solidFill>
-              </a:rPr>
-            </a:br>
-            <a:r>
-              <a:rPr lang="de-DE" sz="1200" dirty="0">
-                <a:solidFill>
-                  <a:schemeClr val="bg1">
-                    <a:lumMod val="85000"/>
-                  </a:schemeClr>
-                </a:solidFill>
-              </a:rPr>
-              <a:t>-Zeitrechnungen Logs und Git Logs erstellt</a:t>
-            </a:r>
-            <a:br>
-              <a:rPr lang="de-DE" sz="1200" dirty="0">
-                <a:solidFill>
-                  <a:schemeClr val="bg1">
-                    <a:lumMod val="85000"/>
-                  </a:schemeClr>
-                </a:solidFill>
-              </a:rPr>
-            </a:br>
-            <a:br>
-              <a:rPr lang="de-DE" sz="1200" dirty="0">
-                <a:solidFill>
-                  <a:schemeClr val="bg1">
-                    <a:lumMod val="85000"/>
-                  </a:schemeClr>
-                </a:solidFill>
-              </a:rPr>
-            </a:br>
-            <a:r>
-              <a:rPr lang="de-DE" sz="1200" dirty="0">
-                <a:solidFill>
-                  <a:schemeClr val="bg1">
-                    <a:lumMod val="85000"/>
-                  </a:schemeClr>
-                </a:solidFill>
-              </a:rPr>
-              <a:t>-Erkläre Graph</a:t>
-            </a:r>
-          </a:p>
-          <a:p>
-            <a:br>
-              <a:rPr lang="de-DE" dirty="0"/>
-            </a:br>
+          </a:p>
+          <a:p>
+            <a:pPr marL="0" marR="0" lvl="0" indent="0" algn="l" defTabSz="914400" rtl="0" eaLnBrk="1" fontAlgn="auto" latinLnBrk="0" hangingPunct="1">
+              <a:lnSpc>
+                <a:spcPct val="100000"/>
+              </a:lnSpc>
+              <a:spcBef>
+                <a:spcPts val="0"/>
+              </a:spcBef>
+              <a:spcAft>
+                <a:spcPts val="0"/>
+              </a:spcAft>
+              <a:buClrTx/>
+              <a:buSzTx/>
+              <a:buFont typeface="Wingdings" panose="05000000000000000000" pitchFamily="2" charset="2"/>
+              <a:buNone/>
+              <a:tabLst/>
+              <a:defRPr/>
+            </a:pPr>
             <a:r>
               <a:rPr lang="de-DE" dirty="0"/>
-              <a:t>- Verschätzung admin, </a:t>
+              <a:t>-&gt; Wir achten nur auf unsere Funktionen und liefern gerüst. </a:t>
             </a:r>
             <a:br>
               <a:rPr lang="de-DE" dirty="0"/>
             </a:br>
             <a:r>
               <a:rPr lang="de-DE" dirty="0"/>
-              <a:t>- Wollen Coden</a:t>
+              <a:t>   Besonders achten wir auf Cache und Wie wir mit den IDS umgehen. </a:t>
+            </a:r>
+          </a:p>
+          <a:p>
+            <a:pPr marL="0" marR="0" lvl="0" indent="0" algn="l" defTabSz="914400" rtl="0" eaLnBrk="1" fontAlgn="auto" latinLnBrk="0" hangingPunct="1">
+              <a:lnSpc>
+                <a:spcPct val="100000"/>
+              </a:lnSpc>
+              <a:spcBef>
+                <a:spcPts val="0"/>
+              </a:spcBef>
+              <a:spcAft>
+                <a:spcPts val="0"/>
+              </a:spcAft>
+              <a:buClrTx/>
+              <a:buSzTx/>
+              <a:buFont typeface="Wingdings" panose="05000000000000000000" pitchFamily="2" charset="2"/>
+              <a:buNone/>
+              <a:tabLst/>
+              <a:defRPr/>
+            </a:pPr>
+            <a:r>
+              <a:rPr lang="de-DE" dirty="0"/>
+              <a:t>Wir haben xx Coverage. Noch nicht alles aber sind noch dran. Restlichen xx prozent sind keine hohe priorität</a:t>
             </a:r>
             <a:br>
               <a:rPr lang="de-DE" dirty="0"/>
             </a:br>
             <a:r>
               <a:rPr lang="de-DE" dirty="0"/>
-              <a:t>-Denkt nicht an Admin Aufgaben( Git erstellen, emails. Etc git wird durch doku ersetzt.)</a:t>
-            </a:r>
-            <a:br>
-              <a:rPr lang="de-DE" dirty="0"/>
-            </a:br>
-            <a:endParaRPr lang="de-DE" dirty="0"/>
-          </a:p>
-          <a:p>
-            <a:r>
-              <a:rPr lang="de-DE" dirty="0"/>
-              <a:t>-Verschätzung noch schlimmer!!</a:t>
+              <a:t>Fokus auf edge cases ( Ungültige Eingabe, leere Ausgaben / Eingaben)</a:t>
             </a:r>
             <a:br>
               <a:rPr lang="de-DE" dirty="0"/>
             </a:br>
             <a:r>
               <a:rPr lang="de-DE" dirty="0"/>
-              <a:t>-Keine dokumentation, keine tests:</a:t>
+              <a:t>Framework: </a:t>
+            </a:r>
+            <a:r>
+              <a:rPr lang="en-GB" dirty="0"/>
+              <a:t>(</a:t>
+            </a:r>
+            <a:r>
+              <a:rPr lang="en-GB" dirty="0" err="1"/>
+              <a:t>Minitest</a:t>
+            </a:r>
+            <a:r>
+              <a:rPr lang="en-GB" dirty="0"/>
+              <a:t>/</a:t>
+            </a:r>
+            <a:r>
+              <a:rPr lang="en-GB" dirty="0" err="1"/>
+              <a:t>RSpec</a:t>
+            </a:r>
+            <a:r>
+              <a:rPr lang="en-GB"/>
+              <a:t>)</a:t>
             </a:r>
             <a:br>
-              <a:rPr lang="de-DE" dirty="0"/>
-            </a:br>
-            <a:r>
-              <a:rPr lang="de-DE" dirty="0"/>
-              <a:t>- NOOOCHH keine probleme</a:t>
-            </a:r>
-            <a:br>
-              <a:rPr lang="de-DE" dirty="0"/>
-            </a:br>
-            <a:r>
-              <a:rPr lang="de-DE" dirty="0"/>
-              <a:t>-Admin bruacht um einiges mehr Zeit</a:t>
-            </a:r>
-          </a:p>
-          <a:p>
-            <a:endParaRPr lang="de-DE" dirty="0"/>
-          </a:p>
-          <a:p>
-            <a:r>
-              <a:rPr lang="de-DE" dirty="0"/>
-              <a:t>-Massnahme: Zeit einplanen und gezwunger admin aufgaben nachgehen</a:t>
-            </a:r>
-            <a:br>
-              <a:rPr lang="de-DE" dirty="0"/>
-            </a:br>
-            <a:br>
-              <a:rPr lang="de-DE" dirty="0"/>
-            </a:br>
-            <a:r>
-              <a:rPr lang="de-DE" dirty="0"/>
-              <a:t>-Verteilung Unbalanciert,</a:t>
-            </a:r>
-          </a:p>
-          <a:p>
-            <a:r>
-              <a:rPr lang="de-DE" dirty="0"/>
-              <a:t>-alle zufrieden, </a:t>
-            </a:r>
-          </a:p>
-          <a:p>
-            <a:r>
-              <a:rPr lang="de-DE" dirty="0"/>
-              <a:t>Grund: warum niemand ungklücklich wurde, kommunikation&gt;&gt;&gt;</a:t>
-            </a:r>
-            <a:br>
-              <a:rPr lang="de-DE" dirty="0"/>
-            </a:br>
-            <a:br>
-              <a:rPr lang="de-DE" dirty="0"/>
+              <a:rPr lang="en-GB"/>
             </a:br>
             <a:endParaRPr lang="de-DE" dirty="0"/>
           </a:p>
@@ -2354,7 +2176,7 @@
           <a:p>
             <a:fld id="{51BF6546-9EDD-4CCD-BFAA-B3D66A670733}" type="slidenum">
               <a:rPr lang="de-DE" smtClean="0"/>
-              <a:t>4</a:t>
+              <a:t>3</a:t>
             </a:fld>
             <a:endParaRPr lang="de-DE"/>
           </a:p>
@@ -2373,700 +2195,7 @@
 </p:notes>
 </file>
 
-<file path=ppt/notesSlides/notesSlide4.xml><?xml version="1.0" encoding="utf-8"?>
-<p:notes xmlns:a="http://schemas.openxmlformats.org/drawingml/2006/main" xmlns:r="http://schemas.openxmlformats.org/officeDocument/2006/relationships" xmlns:p="http://schemas.openxmlformats.org/presentationml/2006/main">
-  <p:cSld>
-    <p:spTree>
-      <p:nvGrpSpPr>
-        <p:cNvPr id="1" name="">
-          <a:extLst>
-            <a:ext uri="{FF2B5EF4-FFF2-40B4-BE49-F238E27FC236}">
-              <a16:creationId xmlns:a16="http://schemas.microsoft.com/office/drawing/2014/main" id="{53D07796-F9FC-5C46-C06B-D28553D02E85}"/>
-            </a:ext>
-          </a:extLst>
-        </p:cNvPr>
-        <p:cNvGrpSpPr/>
-        <p:nvPr/>
-      </p:nvGrpSpPr>
-      <p:grpSpPr>
-        <a:xfrm>
-          <a:off x="0" y="0"/>
-          <a:ext cx="0" cy="0"/>
-          <a:chOff x="0" y="0"/>
-          <a:chExt cx="0" cy="0"/>
-        </a:xfrm>
-      </p:grpSpPr>
-      <p:sp>
-        <p:nvSpPr>
-          <p:cNvPr id="2" name="Slide Image Placeholder 1">
-            <a:extLst>
-              <a:ext uri="{FF2B5EF4-FFF2-40B4-BE49-F238E27FC236}">
-                <a16:creationId xmlns:a16="http://schemas.microsoft.com/office/drawing/2014/main" id="{FFA8AF1C-70E2-954A-89CF-54004B014BFB}"/>
-              </a:ext>
-            </a:extLst>
-          </p:cNvPr>
-          <p:cNvSpPr>
-            <a:spLocks noGrp="1" noRot="1" noChangeAspect="1"/>
-          </p:cNvSpPr>
-          <p:nvPr>
-            <p:ph type="sldImg"/>
-          </p:nvPr>
-        </p:nvSpPr>
-        <p:spPr/>
-      </p:sp>
-      <p:sp>
-        <p:nvSpPr>
-          <p:cNvPr id="3" name="Notes Placeholder 2">
-            <a:extLst>
-              <a:ext uri="{FF2B5EF4-FFF2-40B4-BE49-F238E27FC236}">
-                <a16:creationId xmlns:a16="http://schemas.microsoft.com/office/drawing/2014/main" id="{34714FC0-3D9B-D588-5D27-8AC161E6399B}"/>
-              </a:ext>
-            </a:extLst>
-          </p:cNvPr>
-          <p:cNvSpPr>
-            <a:spLocks noGrp="1"/>
-          </p:cNvSpPr>
-          <p:nvPr>
-            <p:ph type="body" idx="1"/>
-          </p:nvPr>
-        </p:nvSpPr>
-        <p:spPr/>
-        <p:txBody>
-          <a:bodyPr/>
-          <a:lstStyle/>
-          <a:p>
-            <a:pPr marL="0" marR="0" lvl="0" indent="0" algn="l" defTabSz="914400" rtl="0" eaLnBrk="1" fontAlgn="auto" latinLnBrk="0" hangingPunct="1">
-              <a:lnSpc>
-                <a:spcPct val="100000"/>
-              </a:lnSpc>
-              <a:spcBef>
-                <a:spcPts val="0"/>
-              </a:spcBef>
-              <a:spcAft>
-                <a:spcPts val="0"/>
-              </a:spcAft>
-              <a:buClrTx/>
-              <a:buSzTx/>
-              <a:buFontTx/>
-              <a:buNone/>
-              <a:tabLst/>
-              <a:defRPr/>
-            </a:pPr>
-            <a:r>
-              <a:rPr lang="de-DE" dirty="0"/>
-              <a:t>Problem: Spam</a:t>
-            </a:r>
-            <a:br>
-              <a:rPr lang="de-DE" dirty="0"/>
-            </a:br>
-            <a:r>
-              <a:rPr lang="de-DE" dirty="0"/>
-              <a:t>Massnahme: Weekly meetings,</a:t>
-            </a:r>
-          </a:p>
-          <a:p>
-            <a:pPr marL="0" marR="0" lvl="0" indent="0" algn="l" defTabSz="914400" rtl="0" eaLnBrk="1" fontAlgn="auto" latinLnBrk="0" hangingPunct="1">
-              <a:lnSpc>
-                <a:spcPct val="100000"/>
-              </a:lnSpc>
-              <a:spcBef>
-                <a:spcPts val="0"/>
-              </a:spcBef>
-              <a:spcAft>
-                <a:spcPts val="0"/>
-              </a:spcAft>
-              <a:buClrTx/>
-              <a:buSzTx/>
-              <a:buFontTx/>
-              <a:buNone/>
-              <a:tabLst/>
-              <a:defRPr/>
-            </a:pPr>
-            <a:r>
-              <a:rPr lang="de-DE" dirty="0"/>
-              <a:t>- fokus auf Aufgaben und abläufe (schlüsselkonzepte)</a:t>
-            </a:r>
-          </a:p>
-          <a:p>
-            <a:pPr marL="0" marR="0" lvl="0" indent="0" algn="l" defTabSz="914400" rtl="0" eaLnBrk="1" fontAlgn="auto" latinLnBrk="0" hangingPunct="1">
-              <a:lnSpc>
-                <a:spcPct val="100000"/>
-              </a:lnSpc>
-              <a:spcBef>
-                <a:spcPts val="0"/>
-              </a:spcBef>
-              <a:spcAft>
-                <a:spcPts val="0"/>
-              </a:spcAft>
-              <a:buClrTx/>
-              <a:buSzTx/>
-              <a:buFontTx/>
-              <a:buNone/>
-              <a:tabLst/>
-              <a:defRPr/>
-            </a:pPr>
-            <a:br>
-              <a:rPr lang="de-DE" dirty="0"/>
-            </a:br>
-            <a:br>
-              <a:rPr lang="de-DE" dirty="0"/>
-            </a:br>
-            <a:r>
-              <a:rPr lang="de-DE" dirty="0"/>
-              <a:t>Frage : Was kommt in den Chat? Was ist zu viel</a:t>
-            </a:r>
-            <a:br>
-              <a:rPr lang="de-DE" dirty="0"/>
-            </a:br>
-            <a:r>
-              <a:rPr lang="de-DE" dirty="0"/>
-              <a:t>Private nachrichten technisches, trivial nicht</a:t>
-            </a:r>
-            <a:br>
-              <a:rPr lang="de-DE" dirty="0"/>
-            </a:br>
-            <a:r>
-              <a:rPr lang="de-DE" dirty="0"/>
-              <a:t>Niemand will ausgelassen werde, jeder will kontrolle haben. </a:t>
-            </a:r>
-            <a:br>
-              <a:rPr lang="de-DE" dirty="0"/>
-            </a:br>
-            <a:endParaRPr lang="de-DE" dirty="0"/>
-          </a:p>
-          <a:p>
-            <a:pPr marL="0" marR="0" lvl="0" indent="0" algn="l" defTabSz="914400" rtl="0" eaLnBrk="1" fontAlgn="auto" latinLnBrk="0" hangingPunct="1">
-              <a:lnSpc>
-                <a:spcPct val="100000"/>
-              </a:lnSpc>
-              <a:spcBef>
-                <a:spcPts val="0"/>
-              </a:spcBef>
-              <a:spcAft>
-                <a:spcPts val="0"/>
-              </a:spcAft>
-              <a:buClrTx/>
-              <a:buSzTx/>
-              <a:buFontTx/>
-              <a:buNone/>
-              <a:tabLst/>
-              <a:defRPr/>
-            </a:pPr>
-            <a:r>
-              <a:rPr lang="de-DE" dirty="0"/>
-              <a:t>Lesson Learned: Viel ist nicht besser, Gesamtbild wichtig und vertrauen, man geht ein gewisses risiko ein</a:t>
-            </a:r>
-          </a:p>
-        </p:txBody>
-      </p:sp>
-      <p:sp>
-        <p:nvSpPr>
-          <p:cNvPr id="4" name="Slide Number Placeholder 3">
-            <a:extLst>
-              <a:ext uri="{FF2B5EF4-FFF2-40B4-BE49-F238E27FC236}">
-                <a16:creationId xmlns:a16="http://schemas.microsoft.com/office/drawing/2014/main" id="{25D2EF2C-53EA-7A85-1479-B3AB533B94EF}"/>
-              </a:ext>
-            </a:extLst>
-          </p:cNvPr>
-          <p:cNvSpPr>
-            <a:spLocks noGrp="1"/>
-          </p:cNvSpPr>
-          <p:nvPr>
-            <p:ph type="sldNum" sz="quarter" idx="5"/>
-          </p:nvPr>
-        </p:nvSpPr>
-        <p:spPr/>
-        <p:txBody>
-          <a:bodyPr/>
-          <a:lstStyle/>
-          <a:p>
-            <a:fld id="{51BF6546-9EDD-4CCD-BFAA-B3D66A670733}" type="slidenum">
-              <a:rPr lang="de-DE" smtClean="0"/>
-              <a:t>5</a:t>
-            </a:fld>
-            <a:endParaRPr lang="de-DE"/>
-          </a:p>
-        </p:txBody>
-      </p:sp>
-    </p:spTree>
-    <p:extLst>
-      <p:ext uri="{BB962C8B-B14F-4D97-AF65-F5344CB8AC3E}">
-        <p14:creationId xmlns:p14="http://schemas.microsoft.com/office/powerpoint/2010/main" val="1540117653"/>
-      </p:ext>
-    </p:extLst>
-  </p:cSld>
-  <p:clrMapOvr>
-    <a:masterClrMapping/>
-  </p:clrMapOvr>
-</p:notes>
-</file>
-
-<file path=ppt/notesSlides/notesSlide5.xml><?xml version="1.0" encoding="utf-8"?>
-<p:notes xmlns:a="http://schemas.openxmlformats.org/drawingml/2006/main" xmlns:r="http://schemas.openxmlformats.org/officeDocument/2006/relationships" xmlns:p="http://schemas.openxmlformats.org/presentationml/2006/main">
-  <p:cSld>
-    <p:spTree>
-      <p:nvGrpSpPr>
-        <p:cNvPr id="1" name="">
-          <a:extLst>
-            <a:ext uri="{FF2B5EF4-FFF2-40B4-BE49-F238E27FC236}">
-              <a16:creationId xmlns:a16="http://schemas.microsoft.com/office/drawing/2014/main" id="{0F645F2B-0965-DD73-8CE6-0C50999F3FE7}"/>
-            </a:ext>
-          </a:extLst>
-        </p:cNvPr>
-        <p:cNvGrpSpPr/>
-        <p:nvPr/>
-      </p:nvGrpSpPr>
-      <p:grpSpPr>
-        <a:xfrm>
-          <a:off x="0" y="0"/>
-          <a:ext cx="0" cy="0"/>
-          <a:chOff x="0" y="0"/>
-          <a:chExt cx="0" cy="0"/>
-        </a:xfrm>
-      </p:grpSpPr>
-      <p:sp>
-        <p:nvSpPr>
-          <p:cNvPr id="2" name="Slide Image Placeholder 1">
-            <a:extLst>
-              <a:ext uri="{FF2B5EF4-FFF2-40B4-BE49-F238E27FC236}">
-                <a16:creationId xmlns:a16="http://schemas.microsoft.com/office/drawing/2014/main" id="{C48B0191-A93D-07C9-81A7-AE05C0B9E4FF}"/>
-              </a:ext>
-            </a:extLst>
-          </p:cNvPr>
-          <p:cNvSpPr>
-            <a:spLocks noGrp="1" noRot="1" noChangeAspect="1"/>
-          </p:cNvSpPr>
-          <p:nvPr>
-            <p:ph type="sldImg"/>
-          </p:nvPr>
-        </p:nvSpPr>
-        <p:spPr/>
-      </p:sp>
-      <p:sp>
-        <p:nvSpPr>
-          <p:cNvPr id="3" name="Notes Placeholder 2">
-            <a:extLst>
-              <a:ext uri="{FF2B5EF4-FFF2-40B4-BE49-F238E27FC236}">
-                <a16:creationId xmlns:a16="http://schemas.microsoft.com/office/drawing/2014/main" id="{06DEDAD9-F44F-321C-0050-AF1B75031F1A}"/>
-              </a:ext>
-            </a:extLst>
-          </p:cNvPr>
-          <p:cNvSpPr>
-            <a:spLocks noGrp="1"/>
-          </p:cNvSpPr>
-          <p:nvPr>
-            <p:ph type="body" idx="1"/>
-          </p:nvPr>
-        </p:nvSpPr>
-        <p:spPr/>
-        <p:txBody>
-          <a:bodyPr/>
-          <a:lstStyle/>
-          <a:p>
-            <a:pPr marL="0" marR="0" lvl="0" indent="0" algn="l" defTabSz="914400" rtl="0" eaLnBrk="1" fontAlgn="auto" latinLnBrk="0" hangingPunct="1">
-              <a:lnSpc>
-                <a:spcPct val="100000"/>
-              </a:lnSpc>
-              <a:spcBef>
-                <a:spcPts val="0"/>
-              </a:spcBef>
-              <a:spcAft>
-                <a:spcPts val="0"/>
-              </a:spcAft>
-              <a:buClrTx/>
-              <a:buSzTx/>
-              <a:buFontTx/>
-              <a:buNone/>
-              <a:tabLst/>
-              <a:defRPr/>
-            </a:pPr>
-            <a:r>
-              <a:rPr lang="de-DE" dirty="0"/>
-              <a:t>-Dachten Umgebung Problem</a:t>
-            </a:r>
-          </a:p>
-          <a:p>
-            <a:pPr marL="0" marR="0" lvl="0" indent="0" algn="l" defTabSz="914400" rtl="0" eaLnBrk="1" fontAlgn="auto" latinLnBrk="0" hangingPunct="1">
-              <a:lnSpc>
-                <a:spcPct val="100000"/>
-              </a:lnSpc>
-              <a:spcBef>
-                <a:spcPts val="0"/>
-              </a:spcBef>
-              <a:spcAft>
-                <a:spcPts val="0"/>
-              </a:spcAft>
-              <a:buClrTx/>
-              <a:buSzTx/>
-              <a:buFontTx/>
-              <a:buNone/>
-              <a:tabLst/>
-              <a:defRPr/>
-            </a:pPr>
-            <a:r>
-              <a:rPr lang="de-DE" dirty="0"/>
-              <a:t>-NEIN: Vague anforderunge. Viel Vertrauen. Aber unerfahrenheit+ freihet -&gt; erdrückend </a:t>
-            </a:r>
-          </a:p>
-          <a:p>
-            <a:pPr marL="0" marR="0" lvl="0" indent="0" algn="l" defTabSz="914400" rtl="0" eaLnBrk="1" fontAlgn="auto" latinLnBrk="0" hangingPunct="1">
-              <a:lnSpc>
-                <a:spcPct val="100000"/>
-              </a:lnSpc>
-              <a:spcBef>
-                <a:spcPts val="0"/>
-              </a:spcBef>
-              <a:spcAft>
-                <a:spcPts val="0"/>
-              </a:spcAft>
-              <a:buClrTx/>
-              <a:buSzTx/>
-              <a:buFontTx/>
-              <a:buNone/>
-              <a:tabLst/>
-              <a:defRPr/>
-            </a:pPr>
-            <a:endParaRPr lang="de-DE" dirty="0"/>
-          </a:p>
-          <a:p>
-            <a:pPr marL="0" marR="0" lvl="0" indent="0" algn="l" defTabSz="914400" rtl="0" eaLnBrk="1" fontAlgn="auto" latinLnBrk="0" hangingPunct="1">
-              <a:lnSpc>
-                <a:spcPct val="100000"/>
-              </a:lnSpc>
-              <a:spcBef>
-                <a:spcPts val="0"/>
-              </a:spcBef>
-              <a:spcAft>
-                <a:spcPts val="0"/>
-              </a:spcAft>
-              <a:buClrTx/>
-              <a:buSzTx/>
-              <a:buFontTx/>
-              <a:buNone/>
-              <a:tabLst/>
-              <a:defRPr/>
-            </a:pPr>
-            <a:r>
-              <a:rPr lang="de-DE" dirty="0"/>
-              <a:t>Massnahmne: in Kunden versetzt und slebst überlegt was wünsche wären</a:t>
-            </a:r>
-          </a:p>
-          <a:p>
-            <a:pPr marL="0" marR="0" lvl="0" indent="0" algn="l" defTabSz="914400" rtl="0" eaLnBrk="1" fontAlgn="auto" latinLnBrk="0" hangingPunct="1">
-              <a:lnSpc>
-                <a:spcPct val="100000"/>
-              </a:lnSpc>
-              <a:spcBef>
-                <a:spcPts val="0"/>
-              </a:spcBef>
-              <a:spcAft>
-                <a:spcPts val="0"/>
-              </a:spcAft>
-              <a:buClrTx/>
-              <a:buSzTx/>
-              <a:buFontTx/>
-              <a:buNone/>
-              <a:tabLst/>
-              <a:defRPr/>
-            </a:pPr>
-            <a:r>
-              <a:rPr lang="de-DE" dirty="0"/>
-              <a:t>Bisschen geplant und Einfach losgelegt.</a:t>
-            </a:r>
-          </a:p>
-          <a:p>
-            <a:pPr marL="0" marR="0" lvl="0" indent="0" algn="l" defTabSz="914400" rtl="0" eaLnBrk="1" fontAlgn="auto" latinLnBrk="0" hangingPunct="1">
-              <a:lnSpc>
-                <a:spcPct val="100000"/>
-              </a:lnSpc>
-              <a:spcBef>
-                <a:spcPts val="0"/>
-              </a:spcBef>
-              <a:spcAft>
-                <a:spcPts val="0"/>
-              </a:spcAft>
-              <a:buClrTx/>
-              <a:buSzTx/>
-              <a:buFontTx/>
-              <a:buNone/>
-              <a:tabLst/>
-              <a:defRPr/>
-            </a:pPr>
-            <a:br>
-              <a:rPr lang="de-DE" dirty="0"/>
-            </a:br>
-            <a:endParaRPr lang="de-DE" dirty="0"/>
-          </a:p>
-          <a:p>
-            <a:pPr marL="0" marR="0" lvl="0" indent="0" algn="l" defTabSz="914400" rtl="0" eaLnBrk="1" fontAlgn="auto" latinLnBrk="0" hangingPunct="1">
-              <a:lnSpc>
-                <a:spcPct val="100000"/>
-              </a:lnSpc>
-              <a:spcBef>
-                <a:spcPts val="0"/>
-              </a:spcBef>
-              <a:spcAft>
-                <a:spcPts val="0"/>
-              </a:spcAft>
-              <a:buClrTx/>
-              <a:buSzTx/>
-              <a:buFontTx/>
-              <a:buNone/>
-              <a:tabLst/>
-              <a:defRPr/>
-            </a:pPr>
-            <a:r>
-              <a:rPr lang="de-DE" dirty="0"/>
-              <a:t>Hatten viel glück , er war sehr zufrieden</a:t>
-            </a:r>
-            <a:br>
-              <a:rPr lang="de-DE" dirty="0"/>
-            </a:br>
-            <a:endParaRPr lang="de-DE" dirty="0"/>
-          </a:p>
-          <a:p>
-            <a:pPr marL="0" marR="0" lvl="0" indent="0" algn="l" defTabSz="914400" rtl="0" eaLnBrk="1" fontAlgn="auto" latinLnBrk="0" hangingPunct="1">
-              <a:lnSpc>
-                <a:spcPct val="100000"/>
-              </a:lnSpc>
-              <a:spcBef>
-                <a:spcPts val="0"/>
-              </a:spcBef>
-              <a:spcAft>
-                <a:spcPts val="0"/>
-              </a:spcAft>
-              <a:buClrTx/>
-              <a:buSzTx/>
-              <a:buFontTx/>
-              <a:buNone/>
-              <a:tabLst/>
-              <a:defRPr/>
-            </a:pPr>
-            <a:r>
-              <a:rPr lang="de-DE" dirty="0"/>
-              <a:t>Lesson learned. </a:t>
-            </a:r>
-          </a:p>
-          <a:p>
-            <a:pPr marL="0" marR="0" lvl="0" indent="0" algn="l" defTabSz="914400" rtl="0" eaLnBrk="1" fontAlgn="auto" latinLnBrk="0" hangingPunct="1">
-              <a:lnSpc>
-                <a:spcPct val="100000"/>
-              </a:lnSpc>
-              <a:spcBef>
-                <a:spcPts val="0"/>
-              </a:spcBef>
-              <a:spcAft>
-                <a:spcPts val="0"/>
-              </a:spcAft>
-              <a:buClrTx/>
-              <a:buSzTx/>
-              <a:buFontTx/>
-              <a:buNone/>
-              <a:tabLst/>
-              <a:defRPr/>
-            </a:pPr>
-            <a:r>
-              <a:rPr lang="de-DE" dirty="0"/>
-              <a:t>-Gefahr von developer bias , </a:t>
-            </a:r>
-          </a:p>
-          <a:p>
-            <a:pPr marL="0" marR="0" lvl="0" indent="0" algn="l" defTabSz="914400" rtl="0" eaLnBrk="1" fontAlgn="auto" latinLnBrk="0" hangingPunct="1">
-              <a:lnSpc>
-                <a:spcPct val="100000"/>
-              </a:lnSpc>
-              <a:spcBef>
-                <a:spcPts val="0"/>
-              </a:spcBef>
-              <a:spcAft>
-                <a:spcPts val="0"/>
-              </a:spcAft>
-              <a:buClrTx/>
-              <a:buSzTx/>
-              <a:buFontTx/>
-              <a:buNone/>
-              <a:tabLst/>
-              <a:defRPr/>
-            </a:pPr>
-            <a:r>
-              <a:rPr lang="de-DE" dirty="0"/>
-              <a:t>-kunden interaktion wichtig auch wenn wir ihn nur selten sehen. </a:t>
-            </a:r>
-          </a:p>
-          <a:p>
-            <a:pPr marL="0" marR="0" lvl="0" indent="0" algn="l" defTabSz="914400" rtl="0" eaLnBrk="1" fontAlgn="auto" latinLnBrk="0" hangingPunct="1">
-              <a:lnSpc>
-                <a:spcPct val="100000"/>
-              </a:lnSpc>
-              <a:spcBef>
-                <a:spcPts val="0"/>
-              </a:spcBef>
-              <a:spcAft>
-                <a:spcPts val="0"/>
-              </a:spcAft>
-              <a:buClrTx/>
-              <a:buSzTx/>
-              <a:buFontTx/>
-              <a:buNone/>
-              <a:tabLst/>
-              <a:defRPr/>
-            </a:pPr>
-            <a:r>
-              <a:rPr lang="de-DE" dirty="0"/>
-              <a:t>-Striktere Ausrichting an kunden</a:t>
-            </a:r>
-          </a:p>
-          <a:p>
-            <a:pPr marL="0" marR="0" lvl="0" indent="0" algn="l" defTabSz="914400" rtl="0" eaLnBrk="1" fontAlgn="auto" latinLnBrk="0" hangingPunct="1">
-              <a:lnSpc>
-                <a:spcPct val="100000"/>
-              </a:lnSpc>
-              <a:spcBef>
-                <a:spcPts val="0"/>
-              </a:spcBef>
-              <a:spcAft>
-                <a:spcPts val="0"/>
-              </a:spcAft>
-              <a:buClrTx/>
-              <a:buSzTx/>
-              <a:buFontTx/>
-              <a:buNone/>
-              <a:tabLst/>
-              <a:defRPr/>
-            </a:pPr>
-            <a:r>
-              <a:rPr lang="de-DE" dirty="0"/>
-              <a:t>-mehr nachfragen</a:t>
-            </a:r>
-            <a:br>
-              <a:rPr lang="de-DE" dirty="0"/>
-            </a:br>
-            <a:br>
-              <a:rPr lang="de-DE" dirty="0"/>
-            </a:br>
-            <a:r>
-              <a:rPr lang="de-DE" dirty="0"/>
-              <a:t>Allgemein Einsicht: Risiken unbekannt größeres problem,</a:t>
-            </a:r>
-          </a:p>
-          <a:p>
-            <a:pPr marL="171450" marR="0" lvl="0" indent="-171450" algn="l" defTabSz="914400" rtl="0" eaLnBrk="1" fontAlgn="auto" latinLnBrk="0" hangingPunct="1">
-              <a:lnSpc>
-                <a:spcPct val="100000"/>
-              </a:lnSpc>
-              <a:spcBef>
-                <a:spcPts val="0"/>
-              </a:spcBef>
-              <a:spcAft>
-                <a:spcPts val="0"/>
-              </a:spcAft>
-              <a:buClrTx/>
-              <a:buSzTx/>
-              <a:buFontTx/>
-              <a:buChar char="-"/>
-              <a:tabLst/>
-              <a:defRPr/>
-            </a:pPr>
-            <a:r>
-              <a:rPr lang="de-DE" dirty="0"/>
-              <a:t>logisch, aber selbst gross eingeschätze probleme waren keine probleme ,</a:t>
-            </a:r>
-          </a:p>
-          <a:p>
-            <a:pPr marL="171450" marR="0" lvl="0" indent="-171450" algn="l" defTabSz="914400" rtl="0" eaLnBrk="1" fontAlgn="auto" latinLnBrk="0" hangingPunct="1">
-              <a:lnSpc>
-                <a:spcPct val="100000"/>
-              </a:lnSpc>
-              <a:spcBef>
-                <a:spcPts val="0"/>
-              </a:spcBef>
-              <a:spcAft>
-                <a:spcPts val="0"/>
-              </a:spcAft>
-              <a:buClrTx/>
-              <a:buSzTx/>
-              <a:buFontTx/>
-              <a:buChar char="-"/>
-              <a:tabLst/>
-              <a:defRPr/>
-            </a:pPr>
-            <a:r>
-              <a:rPr lang="de-DE" dirty="0"/>
-              <a:t> kleine aber unbekannte schon</a:t>
-            </a:r>
-          </a:p>
-          <a:p>
-            <a:pPr marL="0" marR="0" lvl="0" indent="0" algn="l" defTabSz="914400" rtl="0" eaLnBrk="1" fontAlgn="auto" latinLnBrk="0" hangingPunct="1">
-              <a:lnSpc>
-                <a:spcPct val="100000"/>
-              </a:lnSpc>
-              <a:spcBef>
-                <a:spcPts val="0"/>
-              </a:spcBef>
-              <a:spcAft>
-                <a:spcPts val="0"/>
-              </a:spcAft>
-              <a:buClrTx/>
-              <a:buSzTx/>
-              <a:buFontTx/>
-              <a:buNone/>
-              <a:tabLst/>
-              <a:defRPr/>
-            </a:pPr>
-            <a:r>
-              <a:rPr lang="de-DE" dirty="0"/>
-              <a:t>Deswegen mehr über risiken nachdenken, planen</a:t>
-            </a:r>
-            <a:br>
-              <a:rPr lang="de-DE" dirty="0"/>
-            </a:br>
-            <a:endParaRPr lang="de-DE" dirty="0"/>
-          </a:p>
-        </p:txBody>
-      </p:sp>
-      <p:sp>
-        <p:nvSpPr>
-          <p:cNvPr id="4" name="Slide Number Placeholder 3">
-            <a:extLst>
-              <a:ext uri="{FF2B5EF4-FFF2-40B4-BE49-F238E27FC236}">
-                <a16:creationId xmlns:a16="http://schemas.microsoft.com/office/drawing/2014/main" id="{4C36DA61-8C03-9A37-2C5F-B174934CA688}"/>
-              </a:ext>
-            </a:extLst>
-          </p:cNvPr>
-          <p:cNvSpPr>
-            <a:spLocks noGrp="1"/>
-          </p:cNvSpPr>
-          <p:nvPr>
-            <p:ph type="sldNum" sz="quarter" idx="5"/>
-          </p:nvPr>
-        </p:nvSpPr>
-        <p:spPr/>
-        <p:txBody>
-          <a:bodyPr/>
-          <a:lstStyle/>
-          <a:p>
-            <a:fld id="{51BF6546-9EDD-4CCD-BFAA-B3D66A670733}" type="slidenum">
-              <a:rPr lang="de-DE" smtClean="0"/>
-              <a:t>6</a:t>
-            </a:fld>
-            <a:endParaRPr lang="de-DE"/>
-          </a:p>
-        </p:txBody>
-      </p:sp>
-    </p:spTree>
-    <p:extLst>
-      <p:ext uri="{BB962C8B-B14F-4D97-AF65-F5344CB8AC3E}">
-        <p14:creationId xmlns:p14="http://schemas.microsoft.com/office/powerpoint/2010/main" val="2921765749"/>
-      </p:ext>
-    </p:extLst>
-  </p:cSld>
-  <p:clrMapOvr>
-    <a:masterClrMapping/>
-  </p:clrMapOvr>
-</p:notes>
-</file>
-
-<file path=ppt/notesSlides/notesSlide6.xml><?xml version="1.0" encoding="utf-8"?>
+<file path=ppt/notesSlides/notesSlide3.xml><?xml version="1.0" encoding="utf-8"?>
 <p:notes xmlns:a="http://schemas.openxmlformats.org/drawingml/2006/main" xmlns:r="http://schemas.openxmlformats.org/officeDocument/2006/relationships" xmlns:p="http://schemas.openxmlformats.org/presentationml/2006/main">
   <p:cSld>
     <p:spTree>
@@ -3175,7 +2304,7 @@
           <a:p>
             <a:fld id="{51BF6546-9EDD-4CCD-BFAA-B3D66A670733}" type="slidenum">
               <a:rPr lang="de-DE" smtClean="0"/>
-              <a:t>7</a:t>
+              <a:t>4</a:t>
             </a:fld>
             <a:endParaRPr lang="de-DE"/>
           </a:p>
@@ -3194,7 +2323,7 @@
 </p:notes>
 </file>
 
-<file path=ppt/notesSlides/notesSlide7.xml><?xml version="1.0" encoding="utf-8"?>
+<file path=ppt/notesSlides/notesSlide4.xml><?xml version="1.0" encoding="utf-8"?>
 <p:notes xmlns:a="http://schemas.openxmlformats.org/drawingml/2006/main" xmlns:r="http://schemas.openxmlformats.org/officeDocument/2006/relationships" xmlns:p="http://schemas.openxmlformats.org/presentationml/2006/main">
   <p:cSld>
     <p:spTree>
@@ -3303,7 +2432,7 @@
           <a:p>
             <a:fld id="{51BF6546-9EDD-4CCD-BFAA-B3D66A670733}" type="slidenum">
               <a:rPr lang="de-DE" smtClean="0"/>
-              <a:t>8</a:t>
+              <a:t>5</a:t>
             </a:fld>
             <a:endParaRPr lang="de-DE"/>
           </a:p>
@@ -3471,7 +2600,7 @@
           <a:p>
             <a:fld id="{6CE54ED9-DC92-4B34-96B4-24B4BB371906}" type="datetimeFigureOut">
               <a:rPr lang="de-DE" smtClean="0"/>
-              <a:t>18.03.2026</a:t>
+              <a:t>05.05.2026</a:t>
             </a:fld>
             <a:endParaRPr lang="de-DE"/>
           </a:p>
@@ -3671,7 +2800,7 @@
           <a:p>
             <a:fld id="{6CE54ED9-DC92-4B34-96B4-24B4BB371906}" type="datetimeFigureOut">
               <a:rPr lang="de-DE" smtClean="0"/>
-              <a:t>18.03.2026</a:t>
+              <a:t>05.05.2026</a:t>
             </a:fld>
             <a:endParaRPr lang="de-DE"/>
           </a:p>
@@ -3881,7 +3010,7 @@
           <a:p>
             <a:fld id="{6CE54ED9-DC92-4B34-96B4-24B4BB371906}" type="datetimeFigureOut">
               <a:rPr lang="de-DE" smtClean="0"/>
-              <a:t>18.03.2026</a:t>
+              <a:t>05.05.2026</a:t>
             </a:fld>
             <a:endParaRPr lang="de-DE"/>
           </a:p>
@@ -4081,7 +3210,7 @@
           <a:p>
             <a:fld id="{6CE54ED9-DC92-4B34-96B4-24B4BB371906}" type="datetimeFigureOut">
               <a:rPr lang="de-DE" smtClean="0"/>
-              <a:t>18.03.2026</a:t>
+              <a:t>05.05.2026</a:t>
             </a:fld>
             <a:endParaRPr lang="de-DE"/>
           </a:p>
@@ -4357,7 +3486,7 @@
           <a:p>
             <a:fld id="{6CE54ED9-DC92-4B34-96B4-24B4BB371906}" type="datetimeFigureOut">
               <a:rPr lang="de-DE" smtClean="0"/>
-              <a:t>18.03.2026</a:t>
+              <a:t>05.05.2026</a:t>
             </a:fld>
             <a:endParaRPr lang="de-DE"/>
           </a:p>
@@ -4625,7 +3754,7 @@
           <a:p>
             <a:fld id="{6CE54ED9-DC92-4B34-96B4-24B4BB371906}" type="datetimeFigureOut">
               <a:rPr lang="de-DE" smtClean="0"/>
-              <a:t>18.03.2026</a:t>
+              <a:t>05.05.2026</a:t>
             </a:fld>
             <a:endParaRPr lang="de-DE"/>
           </a:p>
@@ -5040,7 +4169,7 @@
           <a:p>
             <a:fld id="{6CE54ED9-DC92-4B34-96B4-24B4BB371906}" type="datetimeFigureOut">
               <a:rPr lang="de-DE" smtClean="0"/>
-              <a:t>18.03.2026</a:t>
+              <a:t>05.05.2026</a:t>
             </a:fld>
             <a:endParaRPr lang="de-DE"/>
           </a:p>
@@ -5182,7 +4311,7 @@
           <a:p>
             <a:fld id="{6CE54ED9-DC92-4B34-96B4-24B4BB371906}" type="datetimeFigureOut">
               <a:rPr lang="de-DE" smtClean="0"/>
-              <a:t>18.03.2026</a:t>
+              <a:t>05.05.2026</a:t>
             </a:fld>
             <a:endParaRPr lang="de-DE"/>
           </a:p>
@@ -5295,7 +4424,7 @@
           <a:p>
             <a:fld id="{6CE54ED9-DC92-4B34-96B4-24B4BB371906}" type="datetimeFigureOut">
               <a:rPr lang="de-DE" smtClean="0"/>
-              <a:t>18.03.2026</a:t>
+              <a:t>05.05.2026</a:t>
             </a:fld>
             <a:endParaRPr lang="de-DE"/>
           </a:p>
@@ -5608,7 +4737,7 @@
           <a:p>
             <a:fld id="{6CE54ED9-DC92-4B34-96B4-24B4BB371906}" type="datetimeFigureOut">
               <a:rPr lang="de-DE" smtClean="0"/>
-              <a:t>18.03.2026</a:t>
+              <a:t>05.05.2026</a:t>
             </a:fld>
             <a:endParaRPr lang="de-DE"/>
           </a:p>
@@ -5897,7 +5026,7 @@
           <a:p>
             <a:fld id="{6CE54ED9-DC92-4B34-96B4-24B4BB371906}" type="datetimeFigureOut">
               <a:rPr lang="de-DE" smtClean="0"/>
-              <a:t>18.03.2026</a:t>
+              <a:t>05.05.2026</a:t>
             </a:fld>
             <a:endParaRPr lang="de-DE"/>
           </a:p>
@@ -6140,7 +5269,7 @@
           <a:p>
             <a:fld id="{6CE54ED9-DC92-4B34-96B4-24B4BB371906}" type="datetimeFigureOut">
               <a:rPr lang="de-DE" smtClean="0"/>
-              <a:t>18.03.2026</a:t>
+              <a:t>05.05.2026</a:t>
             </a:fld>
             <a:endParaRPr lang="de-DE"/>
           </a:p>
@@ -6581,18 +5710,25 @@
         </p:nvSpPr>
         <p:spPr>
           <a:xfrm>
-            <a:off x="1524000" y="2022838"/>
-            <a:ext cx="9144000" cy="1233124"/>
+            <a:off x="609600" y="2022838"/>
+            <a:ext cx="11101298" cy="1233124"/>
           </a:xfrm>
         </p:spPr>
         <p:txBody>
-          <a:bodyPr/>
+          <a:bodyPr>
+            <a:normAutofit fontScale="90000"/>
+          </a:bodyPr>
           <a:lstStyle/>
           <a:p>
             <a:r>
-              <a:rPr lang="de-DE" b="1" dirty="0"/>
-              <a:t>Analyse der ersten Iteration</a:t>
+              <a:rPr lang="en-GB" b="1" dirty="0" err="1"/>
+              <a:t>Qualitätssicherung</a:t>
             </a:r>
+            <a:r>
+              <a:rPr lang="en-GB" b="1" dirty="0"/>
+              <a:t>, Testing, Usability</a:t>
+            </a:r>
+            <a:endParaRPr lang="de-DE" b="1" dirty="0"/>
           </a:p>
         </p:txBody>
       </p:sp>
@@ -8425,1315 +7561,6 @@
         <p:cNvPr id="1" name="">
           <a:extLst>
             <a:ext uri="{FF2B5EF4-FFF2-40B4-BE49-F238E27FC236}">
-              <a16:creationId xmlns:a16="http://schemas.microsoft.com/office/drawing/2014/main" id="{56521755-B852-5DF1-AB95-71977C326684}"/>
-            </a:ext>
-          </a:extLst>
-        </p:cNvPr>
-        <p:cNvGrpSpPr/>
-        <p:nvPr/>
-      </p:nvGrpSpPr>
-      <p:grpSpPr>
-        <a:xfrm>
-          <a:off x="0" y="0"/>
-          <a:ext cx="0" cy="0"/>
-          <a:chOff x="0" y="0"/>
-          <a:chExt cx="0" cy="0"/>
-        </a:xfrm>
-      </p:grpSpPr>
-      <p:sp>
-        <p:nvSpPr>
-          <p:cNvPr id="2" name="Title 1">
-            <a:extLst>
-              <a:ext uri="{FF2B5EF4-FFF2-40B4-BE49-F238E27FC236}">
-                <a16:creationId xmlns:a16="http://schemas.microsoft.com/office/drawing/2014/main" id="{9C22B2F2-35EA-F240-C7E7-E1697C3557CA}"/>
-              </a:ext>
-            </a:extLst>
-          </p:cNvPr>
-          <p:cNvSpPr>
-            <a:spLocks noGrp="1"/>
-          </p:cNvSpPr>
-          <p:nvPr>
-            <p:ph type="ctrTitle"/>
-          </p:nvPr>
-        </p:nvSpPr>
-        <p:spPr>
-          <a:xfrm>
-            <a:off x="-539750" y="639248"/>
-            <a:ext cx="5810250" cy="1233124"/>
-          </a:xfrm>
-        </p:spPr>
-        <p:txBody>
-          <a:bodyPr>
-            <a:normAutofit/>
-          </a:bodyPr>
-          <a:lstStyle/>
-          <a:p>
-            <a:r>
-              <a:rPr lang="de-DE" sz="4800" dirty="0"/>
-              <a:t>Erste Iteration:</a:t>
-            </a:r>
-          </a:p>
-        </p:txBody>
-      </p:sp>
-      <p:sp>
-        <p:nvSpPr>
-          <p:cNvPr id="3" name="Subtitle 2">
-            <a:extLst>
-              <a:ext uri="{FF2B5EF4-FFF2-40B4-BE49-F238E27FC236}">
-                <a16:creationId xmlns:a16="http://schemas.microsoft.com/office/drawing/2014/main" id="{3DAC79AA-70AB-B541-06C8-2A57B082A166}"/>
-              </a:ext>
-            </a:extLst>
-          </p:cNvPr>
-          <p:cNvSpPr>
-            <a:spLocks noGrp="1"/>
-          </p:cNvSpPr>
-          <p:nvPr>
-            <p:ph type="subTitle" idx="1"/>
-          </p:nvPr>
-        </p:nvSpPr>
-        <p:spPr>
-          <a:xfrm>
-            <a:off x="1364484" y="4277904"/>
-            <a:ext cx="9144000" cy="1655762"/>
-          </a:xfrm>
-        </p:spPr>
-        <p:txBody>
-          <a:bodyPr>
-            <a:normAutofit lnSpcReduction="10000"/>
-          </a:bodyPr>
-          <a:lstStyle/>
-          <a:p>
-            <a:pPr algn="l"/>
-            <a:r>
-              <a:rPr lang="de-DE" dirty="0"/>
-              <a:t>Birk: Front-End</a:t>
-            </a:r>
-          </a:p>
-          <a:p>
-            <a:pPr algn="l"/>
-            <a:r>
-              <a:rPr lang="de-DE" dirty="0"/>
-              <a:t>Carlo: Docker</a:t>
-            </a:r>
-          </a:p>
-          <a:p>
-            <a:pPr algn="l"/>
-            <a:r>
-              <a:rPr lang="de-DE" dirty="0"/>
-              <a:t>Elia: Back-End</a:t>
-            </a:r>
-          </a:p>
-          <a:p>
-            <a:pPr algn="l"/>
-            <a:r>
-              <a:rPr lang="de-DE" dirty="0"/>
-              <a:t>Tom: Back-End</a:t>
-            </a:r>
-          </a:p>
-        </p:txBody>
-      </p:sp>
-      <p:grpSp>
-        <p:nvGrpSpPr>
-          <p:cNvPr id="52" name="Group 51">
-            <a:extLst>
-              <a:ext uri="{FF2B5EF4-FFF2-40B4-BE49-F238E27FC236}">
-                <a16:creationId xmlns:a16="http://schemas.microsoft.com/office/drawing/2014/main" id="{550E9495-7B74-8687-7F62-353D0EA4A060}"/>
-              </a:ext>
-            </a:extLst>
-          </p:cNvPr>
-          <p:cNvGrpSpPr/>
-          <p:nvPr/>
-        </p:nvGrpSpPr>
-        <p:grpSpPr>
-          <a:xfrm>
-            <a:off x="0" y="0"/>
-            <a:ext cx="12249509" cy="720822"/>
-            <a:chOff x="0" y="0"/>
-            <a:chExt cx="12249509" cy="720822"/>
-          </a:xfrm>
-        </p:grpSpPr>
-        <p:pic>
-          <p:nvPicPr>
-            <p:cNvPr id="5" name="Picture 4" descr="SWIss DRG&#10;&#10;AI-generated content may be incorrect.">
-              <a:extLst>
-                <a:ext uri="{FF2B5EF4-FFF2-40B4-BE49-F238E27FC236}">
-                  <a16:creationId xmlns:a16="http://schemas.microsoft.com/office/drawing/2014/main" id="{957B0F03-94AA-B88E-4FAA-D138E9A1E3FD}"/>
-                </a:ext>
-              </a:extLst>
-            </p:cNvPr>
-            <p:cNvPicPr>
-              <a:picLocks noChangeAspect="1"/>
-            </p:cNvPicPr>
-            <p:nvPr/>
-          </p:nvPicPr>
-          <p:blipFill>
-            <a:blip r:embed="rId3"/>
-            <a:stretch>
-              <a:fillRect/>
-            </a:stretch>
-          </p:blipFill>
-          <p:spPr>
-            <a:xfrm>
-              <a:off x="0" y="0"/>
-              <a:ext cx="3657600" cy="720822"/>
-            </a:xfrm>
-            <a:prstGeom prst="rect">
-              <a:avLst/>
-            </a:prstGeom>
-          </p:spPr>
-        </p:pic>
-        <p:sp>
-          <p:nvSpPr>
-            <p:cNvPr id="6" name="Rectangle 5">
-              <a:extLst>
-                <a:ext uri="{FF2B5EF4-FFF2-40B4-BE49-F238E27FC236}">
-                  <a16:creationId xmlns:a16="http://schemas.microsoft.com/office/drawing/2014/main" id="{265BA987-71AF-B997-52B9-42DB813ECA42}"/>
-                </a:ext>
-              </a:extLst>
-            </p:cNvPr>
-            <p:cNvSpPr/>
-            <p:nvPr/>
-          </p:nvSpPr>
-          <p:spPr>
-            <a:xfrm>
-              <a:off x="3657600" y="0"/>
-              <a:ext cx="8591909" cy="720822"/>
-            </a:xfrm>
-            <a:prstGeom prst="rect">
-              <a:avLst/>
-            </a:prstGeom>
-            <a:solidFill>
-              <a:srgbClr val="23B7DF"/>
-            </a:solidFill>
-            <a:ln>
-              <a:noFill/>
-            </a:ln>
-          </p:spPr>
-          <p:style>
-            <a:lnRef idx="2">
-              <a:schemeClr val="accent1">
-                <a:shade val="15000"/>
-              </a:schemeClr>
-            </a:lnRef>
-            <a:fillRef idx="1">
-              <a:schemeClr val="accent1"/>
-            </a:fillRef>
-            <a:effectRef idx="0">
-              <a:schemeClr val="accent1"/>
-            </a:effectRef>
-            <a:fontRef idx="minor">
-              <a:schemeClr val="lt1"/>
-            </a:fontRef>
-          </p:style>
-          <p:txBody>
-            <a:bodyPr rtlCol="0" anchor="ctr"/>
-            <a:lstStyle/>
-            <a:p>
-              <a:pPr algn="ctr"/>
-              <a:endParaRPr lang="de-DE" dirty="0"/>
-            </a:p>
-          </p:txBody>
-        </p:sp>
-        <p:sp>
-          <p:nvSpPr>
-            <p:cNvPr id="32" name="Freeform: Shape 31">
-              <a:extLst>
-                <a:ext uri="{FF2B5EF4-FFF2-40B4-BE49-F238E27FC236}">
-                  <a16:creationId xmlns:a16="http://schemas.microsoft.com/office/drawing/2014/main" id="{DAED6628-0189-410A-A062-4C483C46AD2E}"/>
-                </a:ext>
-              </a:extLst>
-            </p:cNvPr>
-            <p:cNvSpPr/>
-            <p:nvPr/>
-          </p:nvSpPr>
-          <p:spPr>
-            <a:xfrm>
-              <a:off x="11375366" y="276125"/>
-              <a:ext cx="315636" cy="243028"/>
-            </a:xfrm>
-            <a:custGeom>
-              <a:avLst/>
-              <a:gdLst>
-                <a:gd name="csX0" fmla="*/ 74027 w 138371"/>
-                <a:gd name="csY0" fmla="*/ 88156 h 114621"/>
-                <a:gd name="csX1" fmla="*/ 28733 w 138371"/>
-                <a:gd name="csY1" fmla="*/ 114676 h 114621"/>
-                <a:gd name="csX2" fmla="*/ 4143 w 138371"/>
-                <a:gd name="csY2" fmla="*/ 94776 h 114621"/>
-                <a:gd name="csX3" fmla="*/ 7733 w 138371"/>
-                <a:gd name="csY3" fmla="*/ 73231 h 114621"/>
-                <a:gd name="csX4" fmla="*/ 21814 w 138371"/>
-                <a:gd name="csY4" fmla="*/ 8056 h 114621"/>
-                <a:gd name="csX5" fmla="*/ 9 w 138371"/>
-                <a:gd name="csY5" fmla="*/ 8056 h 114621"/>
-                <a:gd name="csX6" fmla="*/ 1935 w 138371"/>
-                <a:gd name="csY6" fmla="*/ 1161 h 114621"/>
-                <a:gd name="csX7" fmla="*/ 27351 w 138371"/>
-                <a:gd name="csY7" fmla="*/ 1161 h 114621"/>
-                <a:gd name="csX8" fmla="*/ 52745 w 138371"/>
-                <a:gd name="csY8" fmla="*/ 54 h 114621"/>
-                <a:gd name="csX9" fmla="*/ 35916 w 138371"/>
-                <a:gd name="csY9" fmla="*/ 71586 h 114621"/>
-                <a:gd name="csX10" fmla="*/ 31763 w 138371"/>
-                <a:gd name="csY10" fmla="*/ 94513 h 114621"/>
-                <a:gd name="csX11" fmla="*/ 43636 w 138371"/>
-                <a:gd name="csY11" fmla="*/ 103341 h 114621"/>
-                <a:gd name="csX12" fmla="*/ 58002 w 138371"/>
-                <a:gd name="csY12" fmla="*/ 97262 h 114621"/>
-                <a:gd name="csX13" fmla="*/ 79543 w 138371"/>
-                <a:gd name="csY13" fmla="*/ 60251 h 114621"/>
-                <a:gd name="csX14" fmla="*/ 93630 w 138371"/>
-                <a:gd name="csY14" fmla="*/ 1161 h 114621"/>
-                <a:gd name="csX15" fmla="*/ 122352 w 138371"/>
-                <a:gd name="csY15" fmla="*/ 1161 h 114621"/>
-                <a:gd name="csX16" fmla="*/ 103856 w 138371"/>
-                <a:gd name="csY16" fmla="*/ 82074 h 114621"/>
-                <a:gd name="csX17" fmla="*/ 101088 w 138371"/>
-                <a:gd name="csY17" fmla="*/ 98644 h 114621"/>
-                <a:gd name="csX18" fmla="*/ 106601 w 138371"/>
-                <a:gd name="csY18" fmla="*/ 103078 h 114621"/>
-                <a:gd name="csX19" fmla="*/ 132301 w 138371"/>
-                <a:gd name="csY19" fmla="*/ 72127 h 114621"/>
-                <a:gd name="csX20" fmla="*/ 138380 w 138371"/>
-                <a:gd name="csY20" fmla="*/ 75457 h 114621"/>
-                <a:gd name="csX21" fmla="*/ 94725 w 138371"/>
-                <a:gd name="csY21" fmla="*/ 114676 h 114621"/>
-                <a:gd name="csX22" fmla="*/ 74027 w 138371"/>
-                <a:gd name="csY22" fmla="*/ 88156 h 114621"/>
-              </a:gdLst>
-              <a:ahLst/>
-              <a:cxnLst>
-                <a:cxn ang="0">
-                  <a:pos x="csX0" y="csY0"/>
-                </a:cxn>
-                <a:cxn ang="0">
-                  <a:pos x="csX1" y="csY1"/>
-                </a:cxn>
-                <a:cxn ang="0">
-                  <a:pos x="csX2" y="csY2"/>
-                </a:cxn>
-                <a:cxn ang="0">
-                  <a:pos x="csX3" y="csY3"/>
-                </a:cxn>
-                <a:cxn ang="0">
-                  <a:pos x="csX4" y="csY4"/>
-                </a:cxn>
-                <a:cxn ang="0">
-                  <a:pos x="csX5" y="csY5"/>
-                </a:cxn>
-                <a:cxn ang="0">
-                  <a:pos x="csX6" y="csY6"/>
-                </a:cxn>
-                <a:cxn ang="0">
-                  <a:pos x="csX7" y="csY7"/>
-                </a:cxn>
-                <a:cxn ang="0">
-                  <a:pos x="csX8" y="csY8"/>
-                </a:cxn>
-                <a:cxn ang="0">
-                  <a:pos x="csX9" y="csY9"/>
-                </a:cxn>
-                <a:cxn ang="0">
-                  <a:pos x="csX10" y="csY10"/>
-                </a:cxn>
-                <a:cxn ang="0">
-                  <a:pos x="csX11" y="csY11"/>
-                </a:cxn>
-                <a:cxn ang="0">
-                  <a:pos x="csX12" y="csY12"/>
-                </a:cxn>
-                <a:cxn ang="0">
-                  <a:pos x="csX13" y="csY13"/>
-                </a:cxn>
-                <a:cxn ang="0">
-                  <a:pos x="csX14" y="csY14"/>
-                </a:cxn>
-                <a:cxn ang="0">
-                  <a:pos x="csX15" y="csY15"/>
-                </a:cxn>
-                <a:cxn ang="0">
-                  <a:pos x="csX16" y="csY16"/>
-                </a:cxn>
-                <a:cxn ang="0">
-                  <a:pos x="csX17" y="csY17"/>
-                </a:cxn>
-                <a:cxn ang="0">
-                  <a:pos x="csX18" y="csY18"/>
-                </a:cxn>
-                <a:cxn ang="0">
-                  <a:pos x="csX19" y="csY19"/>
-                </a:cxn>
-                <a:cxn ang="0">
-                  <a:pos x="csX20" y="csY20"/>
-                </a:cxn>
-                <a:cxn ang="0">
-                  <a:pos x="csX21" y="csY21"/>
-                </a:cxn>
-                <a:cxn ang="0">
-                  <a:pos x="csX22" y="csY22"/>
-                </a:cxn>
-              </a:cxnLst>
-              <a:rect l="l" t="t" r="r" b="b"/>
-              <a:pathLst>
-                <a:path w="138371" h="114621">
-                  <a:moveTo>
-                    <a:pt x="74027" y="88156"/>
-                  </a:moveTo>
-                  <a:cubicBezTo>
-                    <a:pt x="62154" y="103078"/>
-                    <a:pt x="48055" y="114676"/>
-                    <a:pt x="28733" y="114676"/>
-                  </a:cubicBezTo>
-                  <a:cubicBezTo>
-                    <a:pt x="15738" y="114676"/>
-                    <a:pt x="4143" y="110260"/>
-                    <a:pt x="4143" y="94776"/>
-                  </a:cubicBezTo>
-                  <a:cubicBezTo>
-                    <a:pt x="4143" y="90920"/>
-                    <a:pt x="5806" y="82074"/>
-                    <a:pt x="7733" y="73231"/>
-                  </a:cubicBezTo>
-                  <a:cubicBezTo>
-                    <a:pt x="7733" y="73231"/>
-                    <a:pt x="21814" y="8056"/>
-                    <a:pt x="21814" y="8056"/>
-                  </a:cubicBezTo>
-                  <a:cubicBezTo>
-                    <a:pt x="21814" y="8056"/>
-                    <a:pt x="9" y="8056"/>
-                    <a:pt x="9" y="8056"/>
-                  </a:cubicBezTo>
-                  <a:cubicBezTo>
-                    <a:pt x="9" y="8056"/>
-                    <a:pt x="1935" y="1161"/>
-                    <a:pt x="1935" y="1161"/>
-                  </a:cubicBezTo>
-                  <a:cubicBezTo>
-                    <a:pt x="1935" y="1161"/>
-                    <a:pt x="27351" y="1161"/>
-                    <a:pt x="27351" y="1161"/>
-                  </a:cubicBezTo>
-                  <a:cubicBezTo>
-                    <a:pt x="35916" y="1161"/>
-                    <a:pt x="44199" y="54"/>
-                    <a:pt x="52745" y="54"/>
-                  </a:cubicBezTo>
-                  <a:cubicBezTo>
-                    <a:pt x="52745" y="54"/>
-                    <a:pt x="35916" y="71586"/>
-                    <a:pt x="35916" y="71586"/>
-                  </a:cubicBezTo>
-                  <a:cubicBezTo>
-                    <a:pt x="33690" y="81533"/>
-                    <a:pt x="31763" y="90920"/>
-                    <a:pt x="31763" y="94513"/>
-                  </a:cubicBezTo>
-                  <a:cubicBezTo>
-                    <a:pt x="31763" y="101692"/>
-                    <a:pt x="38124" y="103341"/>
-                    <a:pt x="43636" y="103341"/>
-                  </a:cubicBezTo>
-                  <a:cubicBezTo>
-                    <a:pt x="48333" y="103341"/>
-                    <a:pt x="54134" y="99751"/>
-                    <a:pt x="58002" y="97262"/>
-                  </a:cubicBezTo>
-                  <a:cubicBezTo>
-                    <a:pt x="70438" y="89253"/>
-                    <a:pt x="76232" y="74072"/>
-                    <a:pt x="79543" y="60251"/>
-                  </a:cubicBezTo>
-                  <a:cubicBezTo>
-                    <a:pt x="79543" y="60251"/>
-                    <a:pt x="93630" y="1161"/>
-                    <a:pt x="93630" y="1161"/>
-                  </a:cubicBezTo>
-                  <a:cubicBezTo>
-                    <a:pt x="93630" y="1161"/>
-                    <a:pt x="122352" y="1161"/>
-                    <a:pt x="122352" y="1161"/>
-                  </a:cubicBezTo>
-                  <a:cubicBezTo>
-                    <a:pt x="122352" y="1161"/>
-                    <a:pt x="103856" y="82074"/>
-                    <a:pt x="103856" y="82074"/>
-                  </a:cubicBezTo>
-                  <a:cubicBezTo>
-                    <a:pt x="101914" y="90360"/>
-                    <a:pt x="100807" y="96718"/>
-                    <a:pt x="101088" y="98644"/>
-                  </a:cubicBezTo>
-                  <a:cubicBezTo>
-                    <a:pt x="101373" y="101414"/>
-                    <a:pt x="104140" y="103078"/>
-                    <a:pt x="106601" y="103078"/>
-                  </a:cubicBezTo>
-                  <a:cubicBezTo>
-                    <a:pt x="116557" y="103078"/>
-                    <a:pt x="128709" y="80148"/>
-                    <a:pt x="132301" y="72127"/>
-                  </a:cubicBezTo>
-                  <a:cubicBezTo>
-                    <a:pt x="132301" y="72127"/>
-                    <a:pt x="138380" y="75457"/>
-                    <a:pt x="138380" y="75457"/>
-                  </a:cubicBezTo>
-                  <a:cubicBezTo>
-                    <a:pt x="131201" y="93950"/>
-                    <a:pt x="116016" y="114676"/>
-                    <a:pt x="94725" y="114676"/>
-                  </a:cubicBezTo>
-                  <a:cubicBezTo>
-                    <a:pt x="78161" y="114676"/>
-                    <a:pt x="73749" y="104185"/>
-                    <a:pt x="74027" y="88156"/>
-                  </a:cubicBezTo>
-                </a:path>
-              </a:pathLst>
-            </a:custGeom>
-            <a:solidFill>
-              <a:srgbClr val="161413"/>
-            </a:solidFill>
-            <a:ln w="3143" cap="flat">
-              <a:noFill/>
-              <a:prstDash val="solid"/>
-              <a:miter/>
-            </a:ln>
-          </p:spPr>
-          <p:txBody>
-            <a:bodyPr/>
-            <a:lstStyle/>
-            <a:p>
-              <a:endParaRPr lang="de-DE"/>
-            </a:p>
-          </p:txBody>
-        </p:sp>
-        <p:sp>
-          <p:nvSpPr>
-            <p:cNvPr id="33" name="Freeform: Shape 32">
-              <a:extLst>
-                <a:ext uri="{FF2B5EF4-FFF2-40B4-BE49-F238E27FC236}">
-                  <a16:creationId xmlns:a16="http://schemas.microsoft.com/office/drawing/2014/main" id="{3E76EAD4-EC5F-829D-2289-35D51EA1F26D}"/>
-                </a:ext>
-              </a:extLst>
-            </p:cNvPr>
-            <p:cNvSpPr/>
-            <p:nvPr/>
-          </p:nvSpPr>
-          <p:spPr>
-            <a:xfrm>
-              <a:off x="11710898" y="111909"/>
-              <a:ext cx="99163" cy="156002"/>
-            </a:xfrm>
-            <a:custGeom>
-              <a:avLst/>
-              <a:gdLst>
-                <a:gd name="csX0" fmla="*/ 55 w 43472"/>
-                <a:gd name="csY0" fmla="*/ 72867 h 73576"/>
-                <a:gd name="csX1" fmla="*/ 9913 w 43472"/>
-                <a:gd name="csY1" fmla="*/ 29 h 73576"/>
-                <a:gd name="csX2" fmla="*/ 19096 w 43472"/>
-                <a:gd name="csY2" fmla="*/ 29 h 73576"/>
-                <a:gd name="csX3" fmla="*/ 15082 w 43472"/>
-                <a:gd name="csY3" fmla="*/ 28253 h 73576"/>
-                <a:gd name="csX4" fmla="*/ 15280 w 43472"/>
-                <a:gd name="csY4" fmla="*/ 28450 h 73576"/>
-                <a:gd name="csX5" fmla="*/ 26820 w 43472"/>
-                <a:gd name="csY5" fmla="*/ 23179 h 73576"/>
-                <a:gd name="csX6" fmla="*/ 43528 w 43472"/>
-                <a:gd name="csY6" fmla="*/ 44841 h 73576"/>
-                <a:gd name="csX7" fmla="*/ 12637 w 43472"/>
-                <a:gd name="csY7" fmla="*/ 73606 h 73576"/>
-                <a:gd name="csX8" fmla="*/ 55 w 43472"/>
-                <a:gd name="csY8" fmla="*/ 72867 h 73576"/>
-                <a:gd name="csX9" fmla="*/ 13920 w 43472"/>
-                <a:gd name="csY9" fmla="*/ 37022 h 73576"/>
-                <a:gd name="csX10" fmla="*/ 9789 w 43472"/>
-                <a:gd name="csY10" fmla="*/ 66203 h 73576"/>
-                <a:gd name="csX11" fmla="*/ 14764 w 43472"/>
-                <a:gd name="csY11" fmla="*/ 66203 h 73576"/>
-                <a:gd name="csX12" fmla="*/ 34317 w 43472"/>
-                <a:gd name="csY12" fmla="*/ 44643 h 73576"/>
-                <a:gd name="csX13" fmla="*/ 24074 w 43472"/>
-                <a:gd name="csY13" fmla="*/ 31001 h 73576"/>
-                <a:gd name="csX14" fmla="*/ 13920 w 43472"/>
-                <a:gd name="csY14" fmla="*/ 37022 h 73576"/>
-              </a:gdLst>
-              <a:ahLst/>
-              <a:cxnLst>
-                <a:cxn ang="0">
-                  <a:pos x="csX0" y="csY0"/>
-                </a:cxn>
-                <a:cxn ang="0">
-                  <a:pos x="csX1" y="csY1"/>
-                </a:cxn>
-                <a:cxn ang="0">
-                  <a:pos x="csX2" y="csY2"/>
-                </a:cxn>
-                <a:cxn ang="0">
-                  <a:pos x="csX3" y="csY3"/>
-                </a:cxn>
-                <a:cxn ang="0">
-                  <a:pos x="csX4" y="csY4"/>
-                </a:cxn>
-                <a:cxn ang="0">
-                  <a:pos x="csX5" y="csY5"/>
-                </a:cxn>
-                <a:cxn ang="0">
-                  <a:pos x="csX6" y="csY6"/>
-                </a:cxn>
-                <a:cxn ang="0">
-                  <a:pos x="csX7" y="csY7"/>
-                </a:cxn>
-                <a:cxn ang="0">
-                  <a:pos x="csX8" y="csY8"/>
-                </a:cxn>
-                <a:cxn ang="0">
-                  <a:pos x="csX9" y="csY9"/>
-                </a:cxn>
-                <a:cxn ang="0">
-                  <a:pos x="csX10" y="csY10"/>
-                </a:cxn>
-                <a:cxn ang="0">
-                  <a:pos x="csX11" y="csY11"/>
-                </a:cxn>
-                <a:cxn ang="0">
-                  <a:pos x="csX12" y="csY12"/>
-                </a:cxn>
-                <a:cxn ang="0">
-                  <a:pos x="csX13" y="csY13"/>
-                </a:cxn>
-                <a:cxn ang="0">
-                  <a:pos x="csX14" y="csY14"/>
-                </a:cxn>
-              </a:cxnLst>
-              <a:rect l="l" t="t" r="r" b="b"/>
-              <a:pathLst>
-                <a:path w="43472" h="73576">
-                  <a:moveTo>
-                    <a:pt x="55" y="72867"/>
-                  </a:moveTo>
-                  <a:cubicBezTo>
-                    <a:pt x="55" y="72867"/>
-                    <a:pt x="9913" y="29"/>
-                    <a:pt x="9913" y="29"/>
-                  </a:cubicBezTo>
-                  <a:cubicBezTo>
-                    <a:pt x="9913" y="29"/>
-                    <a:pt x="19096" y="29"/>
-                    <a:pt x="19096" y="29"/>
-                  </a:cubicBezTo>
-                  <a:cubicBezTo>
-                    <a:pt x="19096" y="29"/>
-                    <a:pt x="15082" y="28253"/>
-                    <a:pt x="15082" y="28253"/>
-                  </a:cubicBezTo>
-                  <a:cubicBezTo>
-                    <a:pt x="15082" y="28253"/>
-                    <a:pt x="15280" y="28450"/>
-                    <a:pt x="15280" y="28450"/>
-                  </a:cubicBezTo>
-                  <a:cubicBezTo>
-                    <a:pt x="19195" y="24542"/>
-                    <a:pt x="22364" y="23179"/>
-                    <a:pt x="26820" y="23179"/>
-                  </a:cubicBezTo>
-                  <a:cubicBezTo>
-                    <a:pt x="36745" y="23179"/>
-                    <a:pt x="43528" y="32062"/>
-                    <a:pt x="43528" y="44841"/>
-                  </a:cubicBezTo>
-                  <a:cubicBezTo>
-                    <a:pt x="43528" y="57540"/>
-                    <a:pt x="36547" y="73606"/>
-                    <a:pt x="12637" y="73606"/>
-                  </a:cubicBezTo>
-                  <a:cubicBezTo>
-                    <a:pt x="8104" y="73606"/>
-                    <a:pt x="2811" y="73287"/>
-                    <a:pt x="55" y="72867"/>
-                  </a:cubicBezTo>
-                  <a:close/>
-                  <a:moveTo>
-                    <a:pt x="13920" y="37022"/>
-                  </a:moveTo>
-                  <a:cubicBezTo>
-                    <a:pt x="13920" y="37022"/>
-                    <a:pt x="9789" y="66203"/>
-                    <a:pt x="9789" y="66203"/>
-                  </a:cubicBezTo>
-                  <a:cubicBezTo>
-                    <a:pt x="9789" y="66203"/>
-                    <a:pt x="14764" y="66203"/>
-                    <a:pt x="14764" y="66203"/>
-                  </a:cubicBezTo>
-                  <a:cubicBezTo>
-                    <a:pt x="27243" y="66203"/>
-                    <a:pt x="34317" y="57441"/>
-                    <a:pt x="34317" y="44643"/>
-                  </a:cubicBezTo>
-                  <a:cubicBezTo>
-                    <a:pt x="34317" y="35973"/>
-                    <a:pt x="30412" y="31001"/>
-                    <a:pt x="24074" y="31001"/>
-                  </a:cubicBezTo>
-                  <a:cubicBezTo>
-                    <a:pt x="21102" y="31001"/>
-                    <a:pt x="14541" y="33008"/>
-                    <a:pt x="13920" y="37022"/>
-                  </a:cubicBezTo>
-                </a:path>
-              </a:pathLst>
-            </a:custGeom>
-            <a:solidFill>
-              <a:srgbClr val="161413"/>
-            </a:solidFill>
-            <a:ln w="3143" cap="flat">
-              <a:noFill/>
-              <a:prstDash val="solid"/>
-              <a:miter/>
-            </a:ln>
-          </p:spPr>
-          <p:txBody>
-            <a:bodyPr/>
-            <a:lstStyle/>
-            <a:p>
-              <a:endParaRPr lang="de-DE"/>
-            </a:p>
-          </p:txBody>
-        </p:sp>
-      </p:grpSp>
-      <p:sp>
-        <p:nvSpPr>
-          <p:cNvPr id="34" name="Freeform: Shape 33">
-            <a:extLst>
-              <a:ext uri="{FF2B5EF4-FFF2-40B4-BE49-F238E27FC236}">
-                <a16:creationId xmlns:a16="http://schemas.microsoft.com/office/drawing/2014/main" id="{498AB43F-282A-8930-2AB3-B297759BBCB0}"/>
-              </a:ext>
-            </a:extLst>
-          </p:cNvPr>
-          <p:cNvSpPr/>
-          <p:nvPr/>
-        </p:nvSpPr>
-        <p:spPr>
-          <a:xfrm>
-            <a:off x="10508484" y="787817"/>
-            <a:ext cx="1307392" cy="6713"/>
-          </a:xfrm>
-          <a:custGeom>
-            <a:avLst/>
-            <a:gdLst>
-              <a:gd name="csX0" fmla="*/ 9 w 573144"/>
-              <a:gd name="csY0" fmla="*/ 126 h 3166"/>
-              <a:gd name="csX1" fmla="*/ 573154 w 573144"/>
-              <a:gd name="csY1" fmla="*/ 126 h 3166"/>
-            </a:gdLst>
-            <a:ahLst/>
-            <a:cxnLst>
-              <a:cxn ang="0">
-                <a:pos x="csX0" y="csY0"/>
-              </a:cxn>
-              <a:cxn ang="0">
-                <a:pos x="csX1" y="csY1"/>
-              </a:cxn>
-            </a:cxnLst>
-            <a:rect l="l" t="t" r="r" b="b"/>
-            <a:pathLst>
-              <a:path w="573144" h="3166">
-                <a:moveTo>
-                  <a:pt x="9" y="126"/>
-                </a:moveTo>
-                <a:cubicBezTo>
-                  <a:pt x="9" y="126"/>
-                  <a:pt x="573154" y="126"/>
-                  <a:pt x="573154" y="126"/>
-                </a:cubicBezTo>
-              </a:path>
-            </a:pathLst>
-          </a:custGeom>
-          <a:noFill/>
-          <a:ln w="5656" cap="flat">
-            <a:noFill/>
-            <a:prstDash val="solid"/>
-            <a:miter/>
-          </a:ln>
-        </p:spPr>
-        <p:txBody>
-          <a:bodyPr/>
-          <a:lstStyle/>
-          <a:p>
-            <a:endParaRPr lang="de-DE"/>
-          </a:p>
-        </p:txBody>
-      </p:sp>
-      <p:sp>
-        <p:nvSpPr>
-          <p:cNvPr id="56" name="TextBox 55">
-            <a:extLst>
-              <a:ext uri="{FF2B5EF4-FFF2-40B4-BE49-F238E27FC236}">
-                <a16:creationId xmlns:a16="http://schemas.microsoft.com/office/drawing/2014/main" id="{4C5B3544-1E30-EC3A-8D09-4D04B431E3A9}"/>
-              </a:ext>
-            </a:extLst>
-          </p:cNvPr>
-          <p:cNvSpPr txBox="1"/>
-          <p:nvPr/>
-        </p:nvSpPr>
-        <p:spPr>
-          <a:xfrm>
-            <a:off x="1231900" y="2202828"/>
-            <a:ext cx="9276584" cy="523220"/>
-          </a:xfrm>
-          <a:prstGeom prst="rect">
-            <a:avLst/>
-          </a:prstGeom>
-          <a:noFill/>
-        </p:spPr>
-        <p:txBody>
-          <a:bodyPr wrap="square" rtlCol="0">
-            <a:spAutoFit/>
-          </a:bodyPr>
-          <a:lstStyle/>
-          <a:p>
-            <a:r>
-              <a:rPr lang="de-DE" sz="2800" dirty="0"/>
-              <a:t>Einarbeitung und CSV Daten handhaben/anzeigen.</a:t>
-            </a:r>
-          </a:p>
-        </p:txBody>
-      </p:sp>
-      <p:sp>
-        <p:nvSpPr>
-          <p:cNvPr id="4" name="Title 1">
-            <a:extLst>
-              <a:ext uri="{FF2B5EF4-FFF2-40B4-BE49-F238E27FC236}">
-                <a16:creationId xmlns:a16="http://schemas.microsoft.com/office/drawing/2014/main" id="{9F502C87-B392-B888-00B6-D8B50FC78373}"/>
-              </a:ext>
-            </a:extLst>
-          </p:cNvPr>
-          <p:cNvSpPr txBox="1">
-            <a:spLocks/>
-          </p:cNvSpPr>
-          <p:nvPr/>
-        </p:nvSpPr>
-        <p:spPr>
-          <a:xfrm>
-            <a:off x="-349250" y="3155949"/>
-            <a:ext cx="3619500" cy="849357"/>
-          </a:xfrm>
-          <a:prstGeom prst="rect">
-            <a:avLst/>
-          </a:prstGeom>
-        </p:spPr>
-        <p:txBody>
-          <a:bodyPr vert="horz" lIns="91440" tIns="45720" rIns="91440" bIns="45720" rtlCol="0" anchor="b">
-            <a:normAutofit/>
-          </a:bodyPr>
-          <a:lstStyle>
-            <a:lvl1pPr algn="ctr" defTabSz="914400" rtl="0" eaLnBrk="1" latinLnBrk="0" hangingPunct="1">
-              <a:lnSpc>
-                <a:spcPct val="90000"/>
-              </a:lnSpc>
-              <a:spcBef>
-                <a:spcPct val="0"/>
-              </a:spcBef>
-              <a:buNone/>
-              <a:defRPr sz="6000" kern="1200">
-                <a:solidFill>
-                  <a:schemeClr val="tx1"/>
-                </a:solidFill>
-                <a:latin typeface="+mj-lt"/>
-                <a:ea typeface="+mj-ea"/>
-                <a:cs typeface="+mj-cs"/>
-              </a:defRPr>
-            </a:lvl1pPr>
-          </a:lstStyle>
-          <a:p>
-            <a:r>
-              <a:rPr lang="de-DE" sz="4800" dirty="0"/>
-              <a:t>Rollen</a:t>
-            </a:r>
-          </a:p>
-        </p:txBody>
-      </p:sp>
-      <p:sp>
-        <p:nvSpPr>
-          <p:cNvPr id="7" name="Rectangle 6">
-            <a:extLst>
-              <a:ext uri="{FF2B5EF4-FFF2-40B4-BE49-F238E27FC236}">
-                <a16:creationId xmlns:a16="http://schemas.microsoft.com/office/drawing/2014/main" id="{CD1F3690-BC67-4764-9680-012069C2E90D}"/>
-              </a:ext>
-            </a:extLst>
-          </p:cNvPr>
-          <p:cNvSpPr/>
-          <p:nvPr/>
-        </p:nvSpPr>
-        <p:spPr>
-          <a:xfrm>
-            <a:off x="-539750" y="720822"/>
-            <a:ext cx="13316755" cy="6671256"/>
-          </a:xfrm>
-          <a:prstGeom prst="rect">
-            <a:avLst/>
-          </a:prstGeom>
-          <a:solidFill>
-            <a:srgbClr val="000000">
-              <a:alpha val="85098"/>
-            </a:srgbClr>
-          </a:solidFill>
-        </p:spPr>
-        <p:style>
-          <a:lnRef idx="2">
-            <a:schemeClr val="accent1">
-              <a:shade val="15000"/>
-            </a:schemeClr>
-          </a:lnRef>
-          <a:fillRef idx="1">
-            <a:schemeClr val="accent1"/>
-          </a:fillRef>
-          <a:effectRef idx="0">
-            <a:schemeClr val="accent1"/>
-          </a:effectRef>
-          <a:fontRef idx="minor">
-            <a:schemeClr val="lt1"/>
-          </a:fontRef>
-        </p:style>
-        <p:txBody>
-          <a:bodyPr rtlCol="0" anchor="ctr"/>
-          <a:lstStyle/>
-          <a:p>
-            <a:pPr algn="ctr"/>
-            <a:endParaRPr lang="de-DE"/>
-          </a:p>
-        </p:txBody>
-      </p:sp>
-      <p:pic>
-        <p:nvPicPr>
-          <p:cNvPr id="8" name="Picture 7" descr="The image displays a user interface for the SwissDRG Data Search, showing a list of hospitalization records with fields for hospital ID, patient ID, admission date, discharge date, and admission type.&#10;&#10;AI-generated content may be incorrect.">
-            <a:extLst>
-              <a:ext uri="{FF2B5EF4-FFF2-40B4-BE49-F238E27FC236}">
-                <a16:creationId xmlns:a16="http://schemas.microsoft.com/office/drawing/2014/main" id="{351246A8-CC07-37DB-FD44-53C25065BF91}"/>
-              </a:ext>
-            </a:extLst>
-          </p:cNvPr>
-          <p:cNvPicPr>
-            <a:picLocks noChangeAspect="1"/>
-          </p:cNvPicPr>
-          <p:nvPr/>
-        </p:nvPicPr>
-        <p:blipFill>
-          <a:blip r:embed="rId4"/>
-          <a:stretch>
-            <a:fillRect/>
-          </a:stretch>
-        </p:blipFill>
-        <p:spPr>
-          <a:xfrm>
-            <a:off x="3622558" y="720822"/>
-            <a:ext cx="4375383" cy="6088876"/>
-          </a:xfrm>
-          <a:prstGeom prst="rect">
-            <a:avLst/>
-          </a:prstGeom>
-        </p:spPr>
-      </p:pic>
-    </p:spTree>
-    <p:extLst>
-      <p:ext uri="{BB962C8B-B14F-4D97-AF65-F5344CB8AC3E}">
-        <p14:creationId xmlns:p14="http://schemas.microsoft.com/office/powerpoint/2010/main" val="4177985734"/>
-      </p:ext>
-    </p:extLst>
-  </p:cSld>
-  <p:clrMapOvr>
-    <a:masterClrMapping/>
-  </p:clrMapOvr>
-  <p:timing>
-    <p:tnLst>
-      <p:par>
-        <p:cTn id="1" dur="indefinite" restart="never" nodeType="tmRoot">
-          <p:childTnLst>
-            <p:seq concurrent="1" nextAc="seek">
-              <p:cTn id="2" dur="indefinite" nodeType="mainSeq">
-                <p:childTnLst>
-                  <p:par>
-                    <p:cTn id="3" fill="hold">
-                      <p:stCondLst>
-                        <p:cond delay="indefinite"/>
-                      </p:stCondLst>
-                      <p:childTnLst>
-                        <p:par>
-                          <p:cTn id="4" fill="hold">
-                            <p:stCondLst>
-                              <p:cond delay="0"/>
-                            </p:stCondLst>
-                            <p:childTnLst>
-                              <p:par>
-                                <p:cTn id="5" presetID="1" presetClass="entr" presetSubtype="0" fill="hold" grpId="0" nodeType="clickEffect">
-                                  <p:stCondLst>
-                                    <p:cond delay="0"/>
-                                  </p:stCondLst>
-                                  <p:childTnLst>
-                                    <p:set>
-                                      <p:cBhvr>
-                                        <p:cTn id="6" dur="1" fill="hold">
-                                          <p:stCondLst>
-                                            <p:cond delay="0"/>
-                                          </p:stCondLst>
-                                        </p:cTn>
-                                        <p:tgtEl>
-                                          <p:spTgt spid="56"/>
-                                        </p:tgtEl>
-                                        <p:attrNameLst>
-                                          <p:attrName>style.visibility</p:attrName>
-                                        </p:attrNameLst>
-                                      </p:cBhvr>
-                                      <p:to>
-                                        <p:strVal val="visible"/>
-                                      </p:to>
-                                    </p:set>
-                                  </p:childTnLst>
-                                </p:cTn>
-                              </p:par>
-                            </p:childTnLst>
-                          </p:cTn>
-                        </p:par>
-                      </p:childTnLst>
-                    </p:cTn>
-                  </p:par>
-                  <p:par>
-                    <p:cTn id="7" fill="hold">
-                      <p:stCondLst>
-                        <p:cond delay="indefinite"/>
-                      </p:stCondLst>
-                      <p:childTnLst>
-                        <p:par>
-                          <p:cTn id="8" fill="hold">
-                            <p:stCondLst>
-                              <p:cond delay="0"/>
-                            </p:stCondLst>
-                            <p:childTnLst>
-                              <p:par>
-                                <p:cTn id="9" presetID="1" presetClass="entr" presetSubtype="0" fill="hold" grpId="0" nodeType="clickEffect">
-                                  <p:stCondLst>
-                                    <p:cond delay="0"/>
-                                  </p:stCondLst>
-                                  <p:childTnLst>
-                                    <p:set>
-                                      <p:cBhvr>
-                                        <p:cTn id="10" dur="1" fill="hold">
-                                          <p:stCondLst>
-                                            <p:cond delay="0"/>
-                                          </p:stCondLst>
-                                        </p:cTn>
-                                        <p:tgtEl>
-                                          <p:spTgt spid="4"/>
-                                        </p:tgtEl>
-                                        <p:attrNameLst>
-                                          <p:attrName>style.visibility</p:attrName>
-                                        </p:attrNameLst>
-                                      </p:cBhvr>
-                                      <p:to>
-                                        <p:strVal val="visible"/>
-                                      </p:to>
-                                    </p:set>
-                                  </p:childTnLst>
-                                </p:cTn>
-                              </p:par>
-                              <p:par>
-                                <p:cTn id="11" presetID="1" presetClass="entr" presetSubtype="0" fill="hold" grpId="0" nodeType="withEffect">
-                                  <p:stCondLst>
-                                    <p:cond delay="0"/>
-                                  </p:stCondLst>
-                                  <p:childTnLst>
-                                    <p:set>
-                                      <p:cBhvr>
-                                        <p:cTn id="12" dur="1" fill="hold">
-                                          <p:stCondLst>
-                                            <p:cond delay="0"/>
-                                          </p:stCondLst>
-                                        </p:cTn>
-                                        <p:tgtEl>
-                                          <p:spTgt spid="3">
-                                            <p:txEl>
-                                              <p:pRg st="0" end="0"/>
-                                            </p:txEl>
-                                          </p:spTgt>
-                                        </p:tgtEl>
-                                        <p:attrNameLst>
-                                          <p:attrName>style.visibility</p:attrName>
-                                        </p:attrNameLst>
-                                      </p:cBhvr>
-                                      <p:to>
-                                        <p:strVal val="visible"/>
-                                      </p:to>
-                                    </p:set>
-                                  </p:childTnLst>
-                                </p:cTn>
-                              </p:par>
-                            </p:childTnLst>
-                          </p:cTn>
-                        </p:par>
-                      </p:childTnLst>
-                    </p:cTn>
-                  </p:par>
-                  <p:par>
-                    <p:cTn id="13" fill="hold">
-                      <p:stCondLst>
-                        <p:cond delay="indefinite"/>
-                      </p:stCondLst>
-                      <p:childTnLst>
-                        <p:par>
-                          <p:cTn id="14" fill="hold">
-                            <p:stCondLst>
-                              <p:cond delay="0"/>
-                            </p:stCondLst>
-                            <p:childTnLst>
-                              <p:par>
-                                <p:cTn id="15" presetID="1" presetClass="entr" presetSubtype="0" fill="hold" grpId="0" nodeType="clickEffect">
-                                  <p:stCondLst>
-                                    <p:cond delay="0"/>
-                                  </p:stCondLst>
-                                  <p:childTnLst>
-                                    <p:set>
-                                      <p:cBhvr>
-                                        <p:cTn id="16" dur="1" fill="hold">
-                                          <p:stCondLst>
-                                            <p:cond delay="0"/>
-                                          </p:stCondLst>
-                                        </p:cTn>
-                                        <p:tgtEl>
-                                          <p:spTgt spid="3">
-                                            <p:txEl>
-                                              <p:pRg st="1" end="1"/>
-                                            </p:txEl>
-                                          </p:spTgt>
-                                        </p:tgtEl>
-                                        <p:attrNameLst>
-                                          <p:attrName>style.visibility</p:attrName>
-                                        </p:attrNameLst>
-                                      </p:cBhvr>
-                                      <p:to>
-                                        <p:strVal val="visible"/>
-                                      </p:to>
-                                    </p:set>
-                                  </p:childTnLst>
-                                </p:cTn>
-                              </p:par>
-                            </p:childTnLst>
-                          </p:cTn>
-                        </p:par>
-                      </p:childTnLst>
-                    </p:cTn>
-                  </p:par>
-                  <p:par>
-                    <p:cTn id="17" fill="hold">
-                      <p:stCondLst>
-                        <p:cond delay="indefinite"/>
-                      </p:stCondLst>
-                      <p:childTnLst>
-                        <p:par>
-                          <p:cTn id="18" fill="hold">
-                            <p:stCondLst>
-                              <p:cond delay="0"/>
-                            </p:stCondLst>
-                            <p:childTnLst>
-                              <p:par>
-                                <p:cTn id="19" presetID="1" presetClass="entr" presetSubtype="0" fill="hold" grpId="0" nodeType="clickEffect">
-                                  <p:stCondLst>
-                                    <p:cond delay="0"/>
-                                  </p:stCondLst>
-                                  <p:childTnLst>
-                                    <p:set>
-                                      <p:cBhvr>
-                                        <p:cTn id="20" dur="1" fill="hold">
-                                          <p:stCondLst>
-                                            <p:cond delay="0"/>
-                                          </p:stCondLst>
-                                        </p:cTn>
-                                        <p:tgtEl>
-                                          <p:spTgt spid="3">
-                                            <p:txEl>
-                                              <p:pRg st="2" end="2"/>
-                                            </p:txEl>
-                                          </p:spTgt>
-                                        </p:tgtEl>
-                                        <p:attrNameLst>
-                                          <p:attrName>style.visibility</p:attrName>
-                                        </p:attrNameLst>
-                                      </p:cBhvr>
-                                      <p:to>
-                                        <p:strVal val="visible"/>
-                                      </p:to>
-                                    </p:set>
-                                  </p:childTnLst>
-                                </p:cTn>
-                              </p:par>
-                            </p:childTnLst>
-                          </p:cTn>
-                        </p:par>
-                      </p:childTnLst>
-                    </p:cTn>
-                  </p:par>
-                  <p:par>
-                    <p:cTn id="21" fill="hold">
-                      <p:stCondLst>
-                        <p:cond delay="indefinite"/>
-                      </p:stCondLst>
-                      <p:childTnLst>
-                        <p:par>
-                          <p:cTn id="22" fill="hold">
-                            <p:stCondLst>
-                              <p:cond delay="0"/>
-                            </p:stCondLst>
-                            <p:childTnLst>
-                              <p:par>
-                                <p:cTn id="23" presetID="1" presetClass="entr" presetSubtype="0" fill="hold" grpId="0" nodeType="clickEffect">
-                                  <p:stCondLst>
-                                    <p:cond delay="0"/>
-                                  </p:stCondLst>
-                                  <p:childTnLst>
-                                    <p:set>
-                                      <p:cBhvr>
-                                        <p:cTn id="24" dur="1" fill="hold">
-                                          <p:stCondLst>
-                                            <p:cond delay="0"/>
-                                          </p:stCondLst>
-                                        </p:cTn>
-                                        <p:tgtEl>
-                                          <p:spTgt spid="3">
-                                            <p:txEl>
-                                              <p:pRg st="3" end="3"/>
-                                            </p:txEl>
-                                          </p:spTgt>
-                                        </p:tgtEl>
-                                        <p:attrNameLst>
-                                          <p:attrName>style.visibility</p:attrName>
-                                        </p:attrNameLst>
-                                      </p:cBhvr>
-                                      <p:to>
-                                        <p:strVal val="visible"/>
-                                      </p:to>
-                                    </p:set>
-                                  </p:childTnLst>
-                                </p:cTn>
-                              </p:par>
-                            </p:childTnLst>
-                          </p:cTn>
-                        </p:par>
-                      </p:childTnLst>
-                    </p:cTn>
-                  </p:par>
-                  <p:par>
-                    <p:cTn id="25" fill="hold">
-                      <p:stCondLst>
-                        <p:cond delay="indefinite"/>
-                      </p:stCondLst>
-                      <p:childTnLst>
-                        <p:par>
-                          <p:cTn id="26" fill="hold">
-                            <p:stCondLst>
-                              <p:cond delay="0"/>
-                            </p:stCondLst>
-                            <p:childTnLst>
-                              <p:par>
-                                <p:cTn id="27" presetID="1" presetClass="entr" presetSubtype="0" fill="hold" nodeType="clickEffect">
-                                  <p:stCondLst>
-                                    <p:cond delay="0"/>
-                                  </p:stCondLst>
-                                  <p:childTnLst>
-                                    <p:set>
-                                      <p:cBhvr>
-                                        <p:cTn id="28" dur="1" fill="hold">
-                                          <p:stCondLst>
-                                            <p:cond delay="0"/>
-                                          </p:stCondLst>
-                                        </p:cTn>
-                                        <p:tgtEl>
-                                          <p:spTgt spid="8"/>
-                                        </p:tgtEl>
-                                        <p:attrNameLst>
-                                          <p:attrName>style.visibility</p:attrName>
-                                        </p:attrNameLst>
-                                      </p:cBhvr>
-                                      <p:to>
-                                        <p:strVal val="visible"/>
-                                      </p:to>
-                                    </p:set>
-                                  </p:childTnLst>
-                                </p:cTn>
-                              </p:par>
-                              <p:par>
-                                <p:cTn id="29" presetID="1" presetClass="entr" presetSubtype="0" fill="hold" grpId="0" nodeType="withEffect">
-                                  <p:stCondLst>
-                                    <p:cond delay="0"/>
-                                  </p:stCondLst>
-                                  <p:childTnLst>
-                                    <p:set>
-                                      <p:cBhvr>
-                                        <p:cTn id="30" dur="1" fill="hold">
-                                          <p:stCondLst>
-                                            <p:cond delay="0"/>
-                                          </p:stCondLst>
-                                        </p:cTn>
-                                        <p:tgtEl>
-                                          <p:spTgt spid="7"/>
-                                        </p:tgtEl>
-                                        <p:attrNameLst>
-                                          <p:attrName>style.visibility</p:attrName>
-                                        </p:attrNameLst>
-                                      </p:cBhvr>
-                                      <p:to>
-                                        <p:strVal val="visible"/>
-                                      </p:to>
-                                    </p:set>
-                                  </p:childTnLst>
-                                </p:cTn>
-                              </p:par>
-                            </p:childTnLst>
-                          </p:cTn>
-                        </p:par>
-                      </p:childTnLst>
-                    </p:cTn>
-                  </p:par>
-                </p:childTnLst>
-              </p:cTn>
-              <p:prevCondLst>
-                <p:cond evt="onPrev" delay="0">
-                  <p:tgtEl>
-                    <p:sldTgt/>
-                  </p:tgtEl>
-                </p:cond>
-              </p:prevCondLst>
-              <p:nextCondLst>
-                <p:cond evt="onNext" delay="0">
-                  <p:tgtEl>
-                    <p:sldTgt/>
-                  </p:tgtEl>
-                </p:cond>
-              </p:nextCondLst>
-            </p:seq>
-          </p:childTnLst>
-        </p:cTn>
-      </p:par>
-    </p:tnLst>
-    <p:bldLst>
-      <p:bldP spid="3" grpId="0" build="p"/>
-      <p:bldP spid="56" grpId="0"/>
-      <p:bldP spid="4" grpId="0"/>
-      <p:bldP spid="7" grpId="0" animBg="1"/>
-    </p:bldLst>
-  </p:timing>
-</p:sld>
-</file>
-
-<file path=ppt/slides/slide4.xml><?xml version="1.0" encoding="utf-8"?>
-<p:sld xmlns:a="http://schemas.openxmlformats.org/drawingml/2006/main" xmlns:r="http://schemas.openxmlformats.org/officeDocument/2006/relationships" xmlns:p="http://schemas.openxmlformats.org/presentationml/2006/main">
-  <p:cSld>
-    <p:spTree>
-      <p:nvGrpSpPr>
-        <p:cNvPr id="1" name="">
-          <a:extLst>
-            <a:ext uri="{FF2B5EF4-FFF2-40B4-BE49-F238E27FC236}">
               <a16:creationId xmlns:a16="http://schemas.microsoft.com/office/drawing/2014/main" id="{B38CE1AC-A15A-9364-11C6-2C62BBF7474C}"/>
             </a:ext>
           </a:extLst>
@@ -10382,17 +8209,17 @@
         <p:spPr>
           <a:xfrm>
             <a:off x="1133297" y="427406"/>
-            <a:ext cx="5054421" cy="720822"/>
+            <a:ext cx="9472180" cy="720822"/>
           </a:xfrm>
         </p:spPr>
         <p:txBody>
           <a:bodyPr>
-            <a:normAutofit fontScale="90000"/>
+            <a:noAutofit/>
           </a:bodyPr>
           <a:lstStyle/>
           <a:p>
             <a:r>
-              <a:rPr lang="de-DE" dirty="0">
+              <a:rPr lang="de-DE" sz="4000" dirty="0">
                 <a:solidFill>
                   <a:schemeClr val="bg1"/>
                 </a:solidFill>
@@ -10400,9 +8227,9 @@
                   <a:srgbClr val="23B7DF"/>
                 </a:highlight>
               </a:rPr>
-              <a:t>Aufwandanalyse</a:t>
+              <a:t>Unit Tests – wir testen was wir kontrollieren"</a:t>
             </a:r>
-            <a:endParaRPr lang="de-DE" sz="4800" dirty="0">
+            <a:endParaRPr lang="de-DE" sz="3200" dirty="0">
               <a:solidFill>
                 <a:schemeClr val="bg1"/>
               </a:solidFill>
@@ -10426,7 +8253,7 @@
           <p:nvPr>
             <p:extLst>
               <p:ext uri="{D42A27DB-BD31-4B8C-83A1-F6EECF244321}">
-                <p14:modId xmlns:p14="http://schemas.microsoft.com/office/powerpoint/2010/main" val="3770665841"/>
+                <p14:modId xmlns:p14="http://schemas.microsoft.com/office/powerpoint/2010/main" val="3709803552"/>
               </p:ext>
             </p:extLst>
           </p:nvPr>
@@ -10696,2391 +8523,7 @@
 </p:sld>
 </file>
 
-<file path=ppt/slides/slide5.xml><?xml version="1.0" encoding="utf-8"?>
-<p:sld xmlns:a="http://schemas.openxmlformats.org/drawingml/2006/main" xmlns:r="http://schemas.openxmlformats.org/officeDocument/2006/relationships" xmlns:p="http://schemas.openxmlformats.org/presentationml/2006/main">
-  <p:cSld>
-    <p:spTree>
-      <p:nvGrpSpPr>
-        <p:cNvPr id="1" name="">
-          <a:extLst>
-            <a:ext uri="{FF2B5EF4-FFF2-40B4-BE49-F238E27FC236}">
-              <a16:creationId xmlns:a16="http://schemas.microsoft.com/office/drawing/2014/main" id="{1E2EC442-04DC-BED9-067B-C6DCCA4400E2}"/>
-            </a:ext>
-          </a:extLst>
-        </p:cNvPr>
-        <p:cNvGrpSpPr/>
-        <p:nvPr/>
-      </p:nvGrpSpPr>
-      <p:grpSpPr>
-        <a:xfrm>
-          <a:off x="0" y="0"/>
-          <a:ext cx="0" cy="0"/>
-          <a:chOff x="0" y="0"/>
-          <a:chExt cx="0" cy="0"/>
-        </a:xfrm>
-      </p:grpSpPr>
-      <p:sp>
-        <p:nvSpPr>
-          <p:cNvPr id="6" name="Rectangle 5">
-            <a:extLst>
-              <a:ext uri="{FF2B5EF4-FFF2-40B4-BE49-F238E27FC236}">
-                <a16:creationId xmlns:a16="http://schemas.microsoft.com/office/drawing/2014/main" id="{DBFAC07B-3BA0-95A8-4A14-957EA62B000C}"/>
-              </a:ext>
-            </a:extLst>
-          </p:cNvPr>
-          <p:cNvSpPr/>
-          <p:nvPr/>
-        </p:nvSpPr>
-        <p:spPr>
-          <a:xfrm>
-            <a:off x="-158750" y="-177800"/>
-            <a:ext cx="12408259" cy="1419193"/>
-          </a:xfrm>
-          <a:prstGeom prst="rect">
-            <a:avLst/>
-          </a:prstGeom>
-          <a:solidFill>
-            <a:srgbClr val="23B7DF"/>
-          </a:solidFill>
-          <a:ln>
-            <a:noFill/>
-          </a:ln>
-        </p:spPr>
-        <p:style>
-          <a:lnRef idx="2">
-            <a:schemeClr val="accent1">
-              <a:shade val="15000"/>
-            </a:schemeClr>
-          </a:lnRef>
-          <a:fillRef idx="1">
-            <a:schemeClr val="accent1"/>
-          </a:fillRef>
-          <a:effectRef idx="0">
-            <a:schemeClr val="accent1"/>
-          </a:effectRef>
-          <a:fontRef idx="minor">
-            <a:schemeClr val="lt1"/>
-          </a:fontRef>
-        </p:style>
-        <p:txBody>
-          <a:bodyPr rtlCol="0" anchor="ctr"/>
-          <a:lstStyle/>
-          <a:p>
-            <a:pPr algn="ctr"/>
-            <a:endParaRPr lang="de-DE" dirty="0"/>
-          </a:p>
-        </p:txBody>
-      </p:sp>
-      <p:pic>
-        <p:nvPicPr>
-          <p:cNvPr id="5" name="Picture 4" descr="SWIss DRG&#10;&#10;AI-generated content may be incorrect.">
-            <a:extLst>
-              <a:ext uri="{FF2B5EF4-FFF2-40B4-BE49-F238E27FC236}">
-                <a16:creationId xmlns:a16="http://schemas.microsoft.com/office/drawing/2014/main" id="{93CE94DA-EF62-E2F0-9A9F-482A6C221E39}"/>
-              </a:ext>
-            </a:extLst>
-          </p:cNvPr>
-          <p:cNvPicPr>
-            <a:picLocks noChangeAspect="1"/>
-          </p:cNvPicPr>
-          <p:nvPr/>
-        </p:nvPicPr>
-        <p:blipFill>
-          <a:blip r:embed="rId3"/>
-          <a:stretch>
-            <a:fillRect/>
-          </a:stretch>
-        </p:blipFill>
-        <p:spPr>
-          <a:xfrm>
-            <a:off x="0" y="520571"/>
-            <a:ext cx="3657600" cy="720822"/>
-          </a:xfrm>
-          <a:prstGeom prst="rect">
-            <a:avLst/>
-          </a:prstGeom>
-        </p:spPr>
-      </p:pic>
-      <p:sp>
-        <p:nvSpPr>
-          <p:cNvPr id="32" name="Freeform: Shape 31">
-            <a:extLst>
-              <a:ext uri="{FF2B5EF4-FFF2-40B4-BE49-F238E27FC236}">
-                <a16:creationId xmlns:a16="http://schemas.microsoft.com/office/drawing/2014/main" id="{99FAE1C4-C0F0-D857-BDDD-619A84163C9C}"/>
-              </a:ext>
-            </a:extLst>
-          </p:cNvPr>
-          <p:cNvSpPr/>
-          <p:nvPr/>
-        </p:nvSpPr>
-        <p:spPr>
-          <a:xfrm>
-            <a:off x="11375366" y="796696"/>
-            <a:ext cx="315636" cy="243028"/>
-          </a:xfrm>
-          <a:custGeom>
-            <a:avLst/>
-            <a:gdLst>
-              <a:gd name="csX0" fmla="*/ 74027 w 138371"/>
-              <a:gd name="csY0" fmla="*/ 88156 h 114621"/>
-              <a:gd name="csX1" fmla="*/ 28733 w 138371"/>
-              <a:gd name="csY1" fmla="*/ 114676 h 114621"/>
-              <a:gd name="csX2" fmla="*/ 4143 w 138371"/>
-              <a:gd name="csY2" fmla="*/ 94776 h 114621"/>
-              <a:gd name="csX3" fmla="*/ 7733 w 138371"/>
-              <a:gd name="csY3" fmla="*/ 73231 h 114621"/>
-              <a:gd name="csX4" fmla="*/ 21814 w 138371"/>
-              <a:gd name="csY4" fmla="*/ 8056 h 114621"/>
-              <a:gd name="csX5" fmla="*/ 9 w 138371"/>
-              <a:gd name="csY5" fmla="*/ 8056 h 114621"/>
-              <a:gd name="csX6" fmla="*/ 1935 w 138371"/>
-              <a:gd name="csY6" fmla="*/ 1161 h 114621"/>
-              <a:gd name="csX7" fmla="*/ 27351 w 138371"/>
-              <a:gd name="csY7" fmla="*/ 1161 h 114621"/>
-              <a:gd name="csX8" fmla="*/ 52745 w 138371"/>
-              <a:gd name="csY8" fmla="*/ 54 h 114621"/>
-              <a:gd name="csX9" fmla="*/ 35916 w 138371"/>
-              <a:gd name="csY9" fmla="*/ 71586 h 114621"/>
-              <a:gd name="csX10" fmla="*/ 31763 w 138371"/>
-              <a:gd name="csY10" fmla="*/ 94513 h 114621"/>
-              <a:gd name="csX11" fmla="*/ 43636 w 138371"/>
-              <a:gd name="csY11" fmla="*/ 103341 h 114621"/>
-              <a:gd name="csX12" fmla="*/ 58002 w 138371"/>
-              <a:gd name="csY12" fmla="*/ 97262 h 114621"/>
-              <a:gd name="csX13" fmla="*/ 79543 w 138371"/>
-              <a:gd name="csY13" fmla="*/ 60251 h 114621"/>
-              <a:gd name="csX14" fmla="*/ 93630 w 138371"/>
-              <a:gd name="csY14" fmla="*/ 1161 h 114621"/>
-              <a:gd name="csX15" fmla="*/ 122352 w 138371"/>
-              <a:gd name="csY15" fmla="*/ 1161 h 114621"/>
-              <a:gd name="csX16" fmla="*/ 103856 w 138371"/>
-              <a:gd name="csY16" fmla="*/ 82074 h 114621"/>
-              <a:gd name="csX17" fmla="*/ 101088 w 138371"/>
-              <a:gd name="csY17" fmla="*/ 98644 h 114621"/>
-              <a:gd name="csX18" fmla="*/ 106601 w 138371"/>
-              <a:gd name="csY18" fmla="*/ 103078 h 114621"/>
-              <a:gd name="csX19" fmla="*/ 132301 w 138371"/>
-              <a:gd name="csY19" fmla="*/ 72127 h 114621"/>
-              <a:gd name="csX20" fmla="*/ 138380 w 138371"/>
-              <a:gd name="csY20" fmla="*/ 75457 h 114621"/>
-              <a:gd name="csX21" fmla="*/ 94725 w 138371"/>
-              <a:gd name="csY21" fmla="*/ 114676 h 114621"/>
-              <a:gd name="csX22" fmla="*/ 74027 w 138371"/>
-              <a:gd name="csY22" fmla="*/ 88156 h 114621"/>
-            </a:gdLst>
-            <a:ahLst/>
-            <a:cxnLst>
-              <a:cxn ang="0">
-                <a:pos x="csX0" y="csY0"/>
-              </a:cxn>
-              <a:cxn ang="0">
-                <a:pos x="csX1" y="csY1"/>
-              </a:cxn>
-              <a:cxn ang="0">
-                <a:pos x="csX2" y="csY2"/>
-              </a:cxn>
-              <a:cxn ang="0">
-                <a:pos x="csX3" y="csY3"/>
-              </a:cxn>
-              <a:cxn ang="0">
-                <a:pos x="csX4" y="csY4"/>
-              </a:cxn>
-              <a:cxn ang="0">
-                <a:pos x="csX5" y="csY5"/>
-              </a:cxn>
-              <a:cxn ang="0">
-                <a:pos x="csX6" y="csY6"/>
-              </a:cxn>
-              <a:cxn ang="0">
-                <a:pos x="csX7" y="csY7"/>
-              </a:cxn>
-              <a:cxn ang="0">
-                <a:pos x="csX8" y="csY8"/>
-              </a:cxn>
-              <a:cxn ang="0">
-                <a:pos x="csX9" y="csY9"/>
-              </a:cxn>
-              <a:cxn ang="0">
-                <a:pos x="csX10" y="csY10"/>
-              </a:cxn>
-              <a:cxn ang="0">
-                <a:pos x="csX11" y="csY11"/>
-              </a:cxn>
-              <a:cxn ang="0">
-                <a:pos x="csX12" y="csY12"/>
-              </a:cxn>
-              <a:cxn ang="0">
-                <a:pos x="csX13" y="csY13"/>
-              </a:cxn>
-              <a:cxn ang="0">
-                <a:pos x="csX14" y="csY14"/>
-              </a:cxn>
-              <a:cxn ang="0">
-                <a:pos x="csX15" y="csY15"/>
-              </a:cxn>
-              <a:cxn ang="0">
-                <a:pos x="csX16" y="csY16"/>
-              </a:cxn>
-              <a:cxn ang="0">
-                <a:pos x="csX17" y="csY17"/>
-              </a:cxn>
-              <a:cxn ang="0">
-                <a:pos x="csX18" y="csY18"/>
-              </a:cxn>
-              <a:cxn ang="0">
-                <a:pos x="csX19" y="csY19"/>
-              </a:cxn>
-              <a:cxn ang="0">
-                <a:pos x="csX20" y="csY20"/>
-              </a:cxn>
-              <a:cxn ang="0">
-                <a:pos x="csX21" y="csY21"/>
-              </a:cxn>
-              <a:cxn ang="0">
-                <a:pos x="csX22" y="csY22"/>
-              </a:cxn>
-            </a:cxnLst>
-            <a:rect l="l" t="t" r="r" b="b"/>
-            <a:pathLst>
-              <a:path w="138371" h="114621">
-                <a:moveTo>
-                  <a:pt x="74027" y="88156"/>
-                </a:moveTo>
-                <a:cubicBezTo>
-                  <a:pt x="62154" y="103078"/>
-                  <a:pt x="48055" y="114676"/>
-                  <a:pt x="28733" y="114676"/>
-                </a:cubicBezTo>
-                <a:cubicBezTo>
-                  <a:pt x="15738" y="114676"/>
-                  <a:pt x="4143" y="110260"/>
-                  <a:pt x="4143" y="94776"/>
-                </a:cubicBezTo>
-                <a:cubicBezTo>
-                  <a:pt x="4143" y="90920"/>
-                  <a:pt x="5806" y="82074"/>
-                  <a:pt x="7733" y="73231"/>
-                </a:cubicBezTo>
-                <a:cubicBezTo>
-                  <a:pt x="7733" y="73231"/>
-                  <a:pt x="21814" y="8056"/>
-                  <a:pt x="21814" y="8056"/>
-                </a:cubicBezTo>
-                <a:cubicBezTo>
-                  <a:pt x="21814" y="8056"/>
-                  <a:pt x="9" y="8056"/>
-                  <a:pt x="9" y="8056"/>
-                </a:cubicBezTo>
-                <a:cubicBezTo>
-                  <a:pt x="9" y="8056"/>
-                  <a:pt x="1935" y="1161"/>
-                  <a:pt x="1935" y="1161"/>
-                </a:cubicBezTo>
-                <a:cubicBezTo>
-                  <a:pt x="1935" y="1161"/>
-                  <a:pt x="27351" y="1161"/>
-                  <a:pt x="27351" y="1161"/>
-                </a:cubicBezTo>
-                <a:cubicBezTo>
-                  <a:pt x="35916" y="1161"/>
-                  <a:pt x="44199" y="54"/>
-                  <a:pt x="52745" y="54"/>
-                </a:cubicBezTo>
-                <a:cubicBezTo>
-                  <a:pt x="52745" y="54"/>
-                  <a:pt x="35916" y="71586"/>
-                  <a:pt x="35916" y="71586"/>
-                </a:cubicBezTo>
-                <a:cubicBezTo>
-                  <a:pt x="33690" y="81533"/>
-                  <a:pt x="31763" y="90920"/>
-                  <a:pt x="31763" y="94513"/>
-                </a:cubicBezTo>
-                <a:cubicBezTo>
-                  <a:pt x="31763" y="101692"/>
-                  <a:pt x="38124" y="103341"/>
-                  <a:pt x="43636" y="103341"/>
-                </a:cubicBezTo>
-                <a:cubicBezTo>
-                  <a:pt x="48333" y="103341"/>
-                  <a:pt x="54134" y="99751"/>
-                  <a:pt x="58002" y="97262"/>
-                </a:cubicBezTo>
-                <a:cubicBezTo>
-                  <a:pt x="70438" y="89253"/>
-                  <a:pt x="76232" y="74072"/>
-                  <a:pt x="79543" y="60251"/>
-                </a:cubicBezTo>
-                <a:cubicBezTo>
-                  <a:pt x="79543" y="60251"/>
-                  <a:pt x="93630" y="1161"/>
-                  <a:pt x="93630" y="1161"/>
-                </a:cubicBezTo>
-                <a:cubicBezTo>
-                  <a:pt x="93630" y="1161"/>
-                  <a:pt x="122352" y="1161"/>
-                  <a:pt x="122352" y="1161"/>
-                </a:cubicBezTo>
-                <a:cubicBezTo>
-                  <a:pt x="122352" y="1161"/>
-                  <a:pt x="103856" y="82074"/>
-                  <a:pt x="103856" y="82074"/>
-                </a:cubicBezTo>
-                <a:cubicBezTo>
-                  <a:pt x="101914" y="90360"/>
-                  <a:pt x="100807" y="96718"/>
-                  <a:pt x="101088" y="98644"/>
-                </a:cubicBezTo>
-                <a:cubicBezTo>
-                  <a:pt x="101373" y="101414"/>
-                  <a:pt x="104140" y="103078"/>
-                  <a:pt x="106601" y="103078"/>
-                </a:cubicBezTo>
-                <a:cubicBezTo>
-                  <a:pt x="116557" y="103078"/>
-                  <a:pt x="128709" y="80148"/>
-                  <a:pt x="132301" y="72127"/>
-                </a:cubicBezTo>
-                <a:cubicBezTo>
-                  <a:pt x="132301" y="72127"/>
-                  <a:pt x="138380" y="75457"/>
-                  <a:pt x="138380" y="75457"/>
-                </a:cubicBezTo>
-                <a:cubicBezTo>
-                  <a:pt x="131201" y="93950"/>
-                  <a:pt x="116016" y="114676"/>
-                  <a:pt x="94725" y="114676"/>
-                </a:cubicBezTo>
-                <a:cubicBezTo>
-                  <a:pt x="78161" y="114676"/>
-                  <a:pt x="73749" y="104185"/>
-                  <a:pt x="74027" y="88156"/>
-                </a:cubicBezTo>
-              </a:path>
-            </a:pathLst>
-          </a:custGeom>
-          <a:solidFill>
-            <a:srgbClr val="161413"/>
-          </a:solidFill>
-          <a:ln w="3143" cap="flat">
-            <a:noFill/>
-            <a:prstDash val="solid"/>
-            <a:miter/>
-          </a:ln>
-        </p:spPr>
-        <p:txBody>
-          <a:bodyPr/>
-          <a:lstStyle/>
-          <a:p>
-            <a:endParaRPr lang="de-DE"/>
-          </a:p>
-        </p:txBody>
-      </p:sp>
-      <p:sp>
-        <p:nvSpPr>
-          <p:cNvPr id="33" name="Freeform: Shape 32">
-            <a:extLst>
-              <a:ext uri="{FF2B5EF4-FFF2-40B4-BE49-F238E27FC236}">
-                <a16:creationId xmlns:a16="http://schemas.microsoft.com/office/drawing/2014/main" id="{CA8C4C08-4F82-4542-21C1-921F8EA70540}"/>
-              </a:ext>
-            </a:extLst>
-          </p:cNvPr>
-          <p:cNvSpPr/>
-          <p:nvPr/>
-        </p:nvSpPr>
-        <p:spPr>
-          <a:xfrm>
-            <a:off x="11710898" y="632480"/>
-            <a:ext cx="99163" cy="156002"/>
-          </a:xfrm>
-          <a:custGeom>
-            <a:avLst/>
-            <a:gdLst>
-              <a:gd name="csX0" fmla="*/ 55 w 43472"/>
-              <a:gd name="csY0" fmla="*/ 72867 h 73576"/>
-              <a:gd name="csX1" fmla="*/ 9913 w 43472"/>
-              <a:gd name="csY1" fmla="*/ 29 h 73576"/>
-              <a:gd name="csX2" fmla="*/ 19096 w 43472"/>
-              <a:gd name="csY2" fmla="*/ 29 h 73576"/>
-              <a:gd name="csX3" fmla="*/ 15082 w 43472"/>
-              <a:gd name="csY3" fmla="*/ 28253 h 73576"/>
-              <a:gd name="csX4" fmla="*/ 15280 w 43472"/>
-              <a:gd name="csY4" fmla="*/ 28450 h 73576"/>
-              <a:gd name="csX5" fmla="*/ 26820 w 43472"/>
-              <a:gd name="csY5" fmla="*/ 23179 h 73576"/>
-              <a:gd name="csX6" fmla="*/ 43528 w 43472"/>
-              <a:gd name="csY6" fmla="*/ 44841 h 73576"/>
-              <a:gd name="csX7" fmla="*/ 12637 w 43472"/>
-              <a:gd name="csY7" fmla="*/ 73606 h 73576"/>
-              <a:gd name="csX8" fmla="*/ 55 w 43472"/>
-              <a:gd name="csY8" fmla="*/ 72867 h 73576"/>
-              <a:gd name="csX9" fmla="*/ 13920 w 43472"/>
-              <a:gd name="csY9" fmla="*/ 37022 h 73576"/>
-              <a:gd name="csX10" fmla="*/ 9789 w 43472"/>
-              <a:gd name="csY10" fmla="*/ 66203 h 73576"/>
-              <a:gd name="csX11" fmla="*/ 14764 w 43472"/>
-              <a:gd name="csY11" fmla="*/ 66203 h 73576"/>
-              <a:gd name="csX12" fmla="*/ 34317 w 43472"/>
-              <a:gd name="csY12" fmla="*/ 44643 h 73576"/>
-              <a:gd name="csX13" fmla="*/ 24074 w 43472"/>
-              <a:gd name="csY13" fmla="*/ 31001 h 73576"/>
-              <a:gd name="csX14" fmla="*/ 13920 w 43472"/>
-              <a:gd name="csY14" fmla="*/ 37022 h 73576"/>
-            </a:gdLst>
-            <a:ahLst/>
-            <a:cxnLst>
-              <a:cxn ang="0">
-                <a:pos x="csX0" y="csY0"/>
-              </a:cxn>
-              <a:cxn ang="0">
-                <a:pos x="csX1" y="csY1"/>
-              </a:cxn>
-              <a:cxn ang="0">
-                <a:pos x="csX2" y="csY2"/>
-              </a:cxn>
-              <a:cxn ang="0">
-                <a:pos x="csX3" y="csY3"/>
-              </a:cxn>
-              <a:cxn ang="0">
-                <a:pos x="csX4" y="csY4"/>
-              </a:cxn>
-              <a:cxn ang="0">
-                <a:pos x="csX5" y="csY5"/>
-              </a:cxn>
-              <a:cxn ang="0">
-                <a:pos x="csX6" y="csY6"/>
-              </a:cxn>
-              <a:cxn ang="0">
-                <a:pos x="csX7" y="csY7"/>
-              </a:cxn>
-              <a:cxn ang="0">
-                <a:pos x="csX8" y="csY8"/>
-              </a:cxn>
-              <a:cxn ang="0">
-                <a:pos x="csX9" y="csY9"/>
-              </a:cxn>
-              <a:cxn ang="0">
-                <a:pos x="csX10" y="csY10"/>
-              </a:cxn>
-              <a:cxn ang="0">
-                <a:pos x="csX11" y="csY11"/>
-              </a:cxn>
-              <a:cxn ang="0">
-                <a:pos x="csX12" y="csY12"/>
-              </a:cxn>
-              <a:cxn ang="0">
-                <a:pos x="csX13" y="csY13"/>
-              </a:cxn>
-              <a:cxn ang="0">
-                <a:pos x="csX14" y="csY14"/>
-              </a:cxn>
-            </a:cxnLst>
-            <a:rect l="l" t="t" r="r" b="b"/>
-            <a:pathLst>
-              <a:path w="43472" h="73576">
-                <a:moveTo>
-                  <a:pt x="55" y="72867"/>
-                </a:moveTo>
-                <a:cubicBezTo>
-                  <a:pt x="55" y="72867"/>
-                  <a:pt x="9913" y="29"/>
-                  <a:pt x="9913" y="29"/>
-                </a:cubicBezTo>
-                <a:cubicBezTo>
-                  <a:pt x="9913" y="29"/>
-                  <a:pt x="19096" y="29"/>
-                  <a:pt x="19096" y="29"/>
-                </a:cubicBezTo>
-                <a:cubicBezTo>
-                  <a:pt x="19096" y="29"/>
-                  <a:pt x="15082" y="28253"/>
-                  <a:pt x="15082" y="28253"/>
-                </a:cubicBezTo>
-                <a:cubicBezTo>
-                  <a:pt x="15082" y="28253"/>
-                  <a:pt x="15280" y="28450"/>
-                  <a:pt x="15280" y="28450"/>
-                </a:cubicBezTo>
-                <a:cubicBezTo>
-                  <a:pt x="19195" y="24542"/>
-                  <a:pt x="22364" y="23179"/>
-                  <a:pt x="26820" y="23179"/>
-                </a:cubicBezTo>
-                <a:cubicBezTo>
-                  <a:pt x="36745" y="23179"/>
-                  <a:pt x="43528" y="32062"/>
-                  <a:pt x="43528" y="44841"/>
-                </a:cubicBezTo>
-                <a:cubicBezTo>
-                  <a:pt x="43528" y="57540"/>
-                  <a:pt x="36547" y="73606"/>
-                  <a:pt x="12637" y="73606"/>
-                </a:cubicBezTo>
-                <a:cubicBezTo>
-                  <a:pt x="8104" y="73606"/>
-                  <a:pt x="2811" y="73287"/>
-                  <a:pt x="55" y="72867"/>
-                </a:cubicBezTo>
-                <a:close/>
-                <a:moveTo>
-                  <a:pt x="13920" y="37022"/>
-                </a:moveTo>
-                <a:cubicBezTo>
-                  <a:pt x="13920" y="37022"/>
-                  <a:pt x="9789" y="66203"/>
-                  <a:pt x="9789" y="66203"/>
-                </a:cubicBezTo>
-                <a:cubicBezTo>
-                  <a:pt x="9789" y="66203"/>
-                  <a:pt x="14764" y="66203"/>
-                  <a:pt x="14764" y="66203"/>
-                </a:cubicBezTo>
-                <a:cubicBezTo>
-                  <a:pt x="27243" y="66203"/>
-                  <a:pt x="34317" y="57441"/>
-                  <a:pt x="34317" y="44643"/>
-                </a:cubicBezTo>
-                <a:cubicBezTo>
-                  <a:pt x="34317" y="35973"/>
-                  <a:pt x="30412" y="31001"/>
-                  <a:pt x="24074" y="31001"/>
-                </a:cubicBezTo>
-                <a:cubicBezTo>
-                  <a:pt x="21102" y="31001"/>
-                  <a:pt x="14541" y="33008"/>
-                  <a:pt x="13920" y="37022"/>
-                </a:cubicBezTo>
-              </a:path>
-            </a:pathLst>
-          </a:custGeom>
-          <a:solidFill>
-            <a:srgbClr val="161413"/>
-          </a:solidFill>
-          <a:ln w="3143" cap="flat">
-            <a:noFill/>
-            <a:prstDash val="solid"/>
-            <a:miter/>
-          </a:ln>
-        </p:spPr>
-        <p:txBody>
-          <a:bodyPr/>
-          <a:lstStyle/>
-          <a:p>
-            <a:endParaRPr lang="de-DE"/>
-          </a:p>
-        </p:txBody>
-      </p:sp>
-      <p:sp>
-        <p:nvSpPr>
-          <p:cNvPr id="34" name="Freeform: Shape 33">
-            <a:extLst>
-              <a:ext uri="{FF2B5EF4-FFF2-40B4-BE49-F238E27FC236}">
-                <a16:creationId xmlns:a16="http://schemas.microsoft.com/office/drawing/2014/main" id="{EAF506C4-64CB-7978-E230-2C101538FFF7}"/>
-              </a:ext>
-            </a:extLst>
-          </p:cNvPr>
-          <p:cNvSpPr/>
-          <p:nvPr/>
-        </p:nvSpPr>
-        <p:spPr>
-          <a:xfrm>
-            <a:off x="10508484" y="787817"/>
-            <a:ext cx="1307392" cy="6713"/>
-          </a:xfrm>
-          <a:custGeom>
-            <a:avLst/>
-            <a:gdLst>
-              <a:gd name="csX0" fmla="*/ 9 w 573144"/>
-              <a:gd name="csY0" fmla="*/ 126 h 3166"/>
-              <a:gd name="csX1" fmla="*/ 573154 w 573144"/>
-              <a:gd name="csY1" fmla="*/ 126 h 3166"/>
-            </a:gdLst>
-            <a:ahLst/>
-            <a:cxnLst>
-              <a:cxn ang="0">
-                <a:pos x="csX0" y="csY0"/>
-              </a:cxn>
-              <a:cxn ang="0">
-                <a:pos x="csX1" y="csY1"/>
-              </a:cxn>
-            </a:cxnLst>
-            <a:rect l="l" t="t" r="r" b="b"/>
-            <a:pathLst>
-              <a:path w="573144" h="3166">
-                <a:moveTo>
-                  <a:pt x="9" y="126"/>
-                </a:moveTo>
-                <a:cubicBezTo>
-                  <a:pt x="9" y="126"/>
-                  <a:pt x="573154" y="126"/>
-                  <a:pt x="573154" y="126"/>
-                </a:cubicBezTo>
-              </a:path>
-            </a:pathLst>
-          </a:custGeom>
-          <a:noFill/>
-          <a:ln w="5656" cap="flat">
-            <a:noFill/>
-            <a:prstDash val="solid"/>
-            <a:miter/>
-          </a:ln>
-        </p:spPr>
-        <p:txBody>
-          <a:bodyPr/>
-          <a:lstStyle/>
-          <a:p>
-            <a:endParaRPr lang="de-DE"/>
-          </a:p>
-        </p:txBody>
-      </p:sp>
-      <p:sp>
-        <p:nvSpPr>
-          <p:cNvPr id="2" name="Title 1">
-            <a:extLst>
-              <a:ext uri="{FF2B5EF4-FFF2-40B4-BE49-F238E27FC236}">
-                <a16:creationId xmlns:a16="http://schemas.microsoft.com/office/drawing/2014/main" id="{37EDC3F3-E5CB-366F-51C1-ABB8928449FF}"/>
-              </a:ext>
-            </a:extLst>
-          </p:cNvPr>
-          <p:cNvSpPr>
-            <a:spLocks noGrp="1"/>
-          </p:cNvSpPr>
-          <p:nvPr>
-            <p:ph type="ctrTitle"/>
-          </p:nvPr>
-        </p:nvSpPr>
-        <p:spPr>
-          <a:xfrm>
-            <a:off x="1133297" y="427406"/>
-            <a:ext cx="5054421" cy="720822"/>
-          </a:xfrm>
-        </p:spPr>
-        <p:txBody>
-          <a:bodyPr>
-            <a:normAutofit fontScale="90000"/>
-          </a:bodyPr>
-          <a:lstStyle/>
-          <a:p>
-            <a:r>
-              <a:rPr lang="de-DE" dirty="0">
-                <a:solidFill>
-                  <a:schemeClr val="bg1"/>
-                </a:solidFill>
-                <a:highlight>
-                  <a:srgbClr val="23B7DF"/>
-                </a:highlight>
-              </a:rPr>
-              <a:t>Kommunikation</a:t>
-            </a:r>
-            <a:endParaRPr lang="de-DE" sz="4800" dirty="0">
-              <a:solidFill>
-                <a:schemeClr val="bg1"/>
-              </a:solidFill>
-              <a:highlight>
-                <a:srgbClr val="23B7DF"/>
-              </a:highlight>
-            </a:endParaRPr>
-          </a:p>
-        </p:txBody>
-      </p:sp>
-      <p:sp>
-        <p:nvSpPr>
-          <p:cNvPr id="12" name="TextBox 11">
-            <a:extLst>
-              <a:ext uri="{FF2B5EF4-FFF2-40B4-BE49-F238E27FC236}">
-                <a16:creationId xmlns:a16="http://schemas.microsoft.com/office/drawing/2014/main" id="{B407F39A-67BB-F12B-B221-E2DC821D053A}"/>
-              </a:ext>
-            </a:extLst>
-          </p:cNvPr>
-          <p:cNvSpPr txBox="1"/>
-          <p:nvPr/>
-        </p:nvSpPr>
-        <p:spPr>
-          <a:xfrm>
-            <a:off x="998113" y="1836629"/>
-            <a:ext cx="10567160" cy="593047"/>
-          </a:xfrm>
-          <a:prstGeom prst="rect">
-            <a:avLst/>
-          </a:prstGeom>
-          <a:noFill/>
-        </p:spPr>
-        <p:txBody>
-          <a:bodyPr wrap="square" rtlCol="0">
-            <a:spAutoFit/>
-          </a:bodyPr>
-          <a:lstStyle/>
-          <a:p>
-            <a:pPr>
-              <a:lnSpc>
-                <a:spcPct val="150000"/>
-              </a:lnSpc>
-            </a:pPr>
-            <a:r>
-              <a:rPr lang="de-DE" sz="2400" b="1" dirty="0"/>
-              <a:t>Problem:</a:t>
-            </a:r>
-            <a:r>
-              <a:rPr lang="de-DE" sz="2400" dirty="0"/>
-              <a:t> Projekt-Updates gehen unter im Chat.</a:t>
-            </a:r>
-          </a:p>
-        </p:txBody>
-      </p:sp>
-      <p:sp>
-        <p:nvSpPr>
-          <p:cNvPr id="15" name="TextBox 14">
-            <a:extLst>
-              <a:ext uri="{FF2B5EF4-FFF2-40B4-BE49-F238E27FC236}">
-                <a16:creationId xmlns:a16="http://schemas.microsoft.com/office/drawing/2014/main" id="{6FC431B3-4CD6-E3F5-5682-601F0152ADEA}"/>
-              </a:ext>
-            </a:extLst>
-          </p:cNvPr>
-          <p:cNvSpPr txBox="1"/>
-          <p:nvPr/>
-        </p:nvSpPr>
-        <p:spPr>
-          <a:xfrm>
-            <a:off x="972355" y="3013656"/>
-            <a:ext cx="9672034" cy="1701043"/>
-          </a:xfrm>
-          <a:prstGeom prst="rect">
-            <a:avLst/>
-          </a:prstGeom>
-          <a:noFill/>
-        </p:spPr>
-        <p:txBody>
-          <a:bodyPr wrap="square" rtlCol="0">
-            <a:spAutoFit/>
-          </a:bodyPr>
-          <a:lstStyle/>
-          <a:p>
-            <a:pPr>
-              <a:lnSpc>
-                <a:spcPct val="150000"/>
-              </a:lnSpc>
-            </a:pPr>
-            <a:r>
-              <a:rPr lang="de-DE" sz="2400" b="1" dirty="0"/>
-              <a:t>Massnahme:</a:t>
-            </a:r>
-            <a:r>
-              <a:rPr lang="de-DE" sz="2400" dirty="0"/>
-              <a:t> Wöchentliche Sync-Meetings ➔ Konzepte statt Code.</a:t>
-            </a:r>
-            <a:br>
-              <a:rPr lang="de-DE" sz="2400" dirty="0"/>
-            </a:br>
-            <a:r>
-              <a:rPr lang="de-DE" sz="2400" dirty="0"/>
-              <a:t>                              Private Chats für technisches</a:t>
-            </a:r>
-            <a:br>
-              <a:rPr lang="de-DE" sz="2400" dirty="0"/>
-            </a:br>
-            <a:endParaRPr lang="de-DE" sz="2400" dirty="0"/>
-          </a:p>
-        </p:txBody>
-      </p:sp>
-      <p:sp>
-        <p:nvSpPr>
-          <p:cNvPr id="16" name="TextBox 15">
-            <a:extLst>
-              <a:ext uri="{FF2B5EF4-FFF2-40B4-BE49-F238E27FC236}">
-                <a16:creationId xmlns:a16="http://schemas.microsoft.com/office/drawing/2014/main" id="{88436E11-CC56-51E9-0C86-61643F2418A5}"/>
-              </a:ext>
-            </a:extLst>
-          </p:cNvPr>
-          <p:cNvSpPr txBox="1"/>
-          <p:nvPr/>
-        </p:nvSpPr>
-        <p:spPr>
-          <a:xfrm>
-            <a:off x="998113" y="4861775"/>
-            <a:ext cx="8390586" cy="1147045"/>
-          </a:xfrm>
-          <a:prstGeom prst="rect">
-            <a:avLst/>
-          </a:prstGeom>
-          <a:noFill/>
-        </p:spPr>
-        <p:txBody>
-          <a:bodyPr wrap="square" rtlCol="0">
-            <a:spAutoFit/>
-          </a:bodyPr>
-          <a:lstStyle/>
-          <a:p>
-            <a:pPr>
-              <a:lnSpc>
-                <a:spcPct val="150000"/>
-              </a:lnSpc>
-            </a:pPr>
-            <a:r>
-              <a:rPr lang="de-DE" sz="2400" b="1" dirty="0"/>
-              <a:t>Lesson Learned:</a:t>
-            </a:r>
-            <a:r>
-              <a:rPr lang="de-DE" sz="2400" dirty="0"/>
-              <a:t> Viel ist nicht besser. </a:t>
-            </a:r>
-            <a:br>
-              <a:rPr lang="de-DE" sz="2400" dirty="0"/>
-            </a:br>
-            <a:r>
-              <a:rPr lang="de-DE" sz="2400" dirty="0"/>
-              <a:t>	                       Verständnis vom Gesamtbildes ist wichtig.</a:t>
-            </a:r>
-          </a:p>
-        </p:txBody>
-      </p:sp>
-    </p:spTree>
-    <p:extLst>
-      <p:ext uri="{BB962C8B-B14F-4D97-AF65-F5344CB8AC3E}">
-        <p14:creationId xmlns:p14="http://schemas.microsoft.com/office/powerpoint/2010/main" val="3379656284"/>
-      </p:ext>
-    </p:extLst>
-  </p:cSld>
-  <p:clrMapOvr>
-    <a:masterClrMapping/>
-  </p:clrMapOvr>
-  <p:timing>
-    <p:tnLst>
-      <p:par>
-        <p:cTn id="1" dur="indefinite" restart="never" nodeType="tmRoot">
-          <p:childTnLst>
-            <p:seq concurrent="1" nextAc="seek">
-              <p:cTn id="2" dur="indefinite" nodeType="mainSeq">
-                <p:childTnLst>
-                  <p:par>
-                    <p:cTn id="3" fill="hold">
-                      <p:stCondLst>
-                        <p:cond delay="indefinite"/>
-                      </p:stCondLst>
-                      <p:childTnLst>
-                        <p:par>
-                          <p:cTn id="4" fill="hold">
-                            <p:stCondLst>
-                              <p:cond delay="0"/>
-                            </p:stCondLst>
-                            <p:childTnLst>
-                              <p:par>
-                                <p:cTn id="5" presetID="1" presetClass="entr" presetSubtype="0" fill="hold" nodeType="clickEffect">
-                                  <p:stCondLst>
-                                    <p:cond delay="0"/>
-                                  </p:stCondLst>
-                                  <p:childTnLst>
-                                    <p:set>
-                                      <p:cBhvr>
-                                        <p:cTn id="6" dur="1" fill="hold">
-                                          <p:stCondLst>
-                                            <p:cond delay="0"/>
-                                          </p:stCondLst>
-                                        </p:cTn>
-                                        <p:tgtEl>
-                                          <p:spTgt spid="12">
-                                            <p:txEl>
-                                              <p:pRg st="0" end="0"/>
-                                            </p:txEl>
-                                          </p:spTgt>
-                                        </p:tgtEl>
-                                        <p:attrNameLst>
-                                          <p:attrName>style.visibility</p:attrName>
-                                        </p:attrNameLst>
-                                      </p:cBhvr>
-                                      <p:to>
-                                        <p:strVal val="visible"/>
-                                      </p:to>
-                                    </p:set>
-                                  </p:childTnLst>
-                                </p:cTn>
-                              </p:par>
-                            </p:childTnLst>
-                          </p:cTn>
-                        </p:par>
-                      </p:childTnLst>
-                    </p:cTn>
-                  </p:par>
-                  <p:par>
-                    <p:cTn id="7" fill="hold">
-                      <p:stCondLst>
-                        <p:cond delay="indefinite"/>
-                      </p:stCondLst>
-                      <p:childTnLst>
-                        <p:par>
-                          <p:cTn id="8" fill="hold">
-                            <p:stCondLst>
-                              <p:cond delay="0"/>
-                            </p:stCondLst>
-                            <p:childTnLst>
-                              <p:par>
-                                <p:cTn id="9" presetID="1" presetClass="entr" presetSubtype="0" fill="hold" grpId="0" nodeType="clickEffect">
-                                  <p:stCondLst>
-                                    <p:cond delay="0"/>
-                                  </p:stCondLst>
-                                  <p:childTnLst>
-                                    <p:set>
-                                      <p:cBhvr>
-                                        <p:cTn id="10" dur="1" fill="hold">
-                                          <p:stCondLst>
-                                            <p:cond delay="0"/>
-                                          </p:stCondLst>
-                                        </p:cTn>
-                                        <p:tgtEl>
-                                          <p:spTgt spid="15"/>
-                                        </p:tgtEl>
-                                        <p:attrNameLst>
-                                          <p:attrName>style.visibility</p:attrName>
-                                        </p:attrNameLst>
-                                      </p:cBhvr>
-                                      <p:to>
-                                        <p:strVal val="visible"/>
-                                      </p:to>
-                                    </p:set>
-                                  </p:childTnLst>
-                                </p:cTn>
-                              </p:par>
-                            </p:childTnLst>
-                          </p:cTn>
-                        </p:par>
-                      </p:childTnLst>
-                    </p:cTn>
-                  </p:par>
-                  <p:par>
-                    <p:cTn id="11" fill="hold">
-                      <p:stCondLst>
-                        <p:cond delay="indefinite"/>
-                      </p:stCondLst>
-                      <p:childTnLst>
-                        <p:par>
-                          <p:cTn id="12" fill="hold">
-                            <p:stCondLst>
-                              <p:cond delay="0"/>
-                            </p:stCondLst>
-                            <p:childTnLst>
-                              <p:par>
-                                <p:cTn id="13" presetID="1" presetClass="entr" presetSubtype="0" fill="hold" grpId="0" nodeType="clickEffect">
-                                  <p:stCondLst>
-                                    <p:cond delay="0"/>
-                                  </p:stCondLst>
-                                  <p:childTnLst>
-                                    <p:set>
-                                      <p:cBhvr>
-                                        <p:cTn id="14" dur="1" fill="hold">
-                                          <p:stCondLst>
-                                            <p:cond delay="0"/>
-                                          </p:stCondLst>
-                                        </p:cTn>
-                                        <p:tgtEl>
-                                          <p:spTgt spid="16"/>
-                                        </p:tgtEl>
-                                        <p:attrNameLst>
-                                          <p:attrName>style.visibility</p:attrName>
-                                        </p:attrNameLst>
-                                      </p:cBhvr>
-                                      <p:to>
-                                        <p:strVal val="visible"/>
-                                      </p:to>
-                                    </p:set>
-                                  </p:childTnLst>
-                                </p:cTn>
-                              </p:par>
-                            </p:childTnLst>
-                          </p:cTn>
-                        </p:par>
-                      </p:childTnLst>
-                    </p:cTn>
-                  </p:par>
-                </p:childTnLst>
-              </p:cTn>
-              <p:prevCondLst>
-                <p:cond evt="onPrev" delay="0">
-                  <p:tgtEl>
-                    <p:sldTgt/>
-                  </p:tgtEl>
-                </p:cond>
-              </p:prevCondLst>
-              <p:nextCondLst>
-                <p:cond evt="onNext" delay="0">
-                  <p:tgtEl>
-                    <p:sldTgt/>
-                  </p:tgtEl>
-                </p:cond>
-              </p:nextCondLst>
-            </p:seq>
-          </p:childTnLst>
-        </p:cTn>
-      </p:par>
-    </p:tnLst>
-    <p:bldLst>
-      <p:bldP spid="15" grpId="0"/>
-      <p:bldP spid="16" grpId="0"/>
-    </p:bldLst>
-  </p:timing>
-</p:sld>
-</file>
-
-<file path=ppt/slides/slide6.xml><?xml version="1.0" encoding="utf-8"?>
-<p:sld xmlns:a="http://schemas.openxmlformats.org/drawingml/2006/main" xmlns:r="http://schemas.openxmlformats.org/officeDocument/2006/relationships" xmlns:p="http://schemas.openxmlformats.org/presentationml/2006/main">
-  <p:cSld>
-    <p:spTree>
-      <p:nvGrpSpPr>
-        <p:cNvPr id="1" name="">
-          <a:extLst>
-            <a:ext uri="{FF2B5EF4-FFF2-40B4-BE49-F238E27FC236}">
-              <a16:creationId xmlns:a16="http://schemas.microsoft.com/office/drawing/2014/main" id="{ABEF2739-B9E1-2B57-9BA8-1CA86CEF0B09}"/>
-            </a:ext>
-          </a:extLst>
-        </p:cNvPr>
-        <p:cNvGrpSpPr/>
-        <p:nvPr/>
-      </p:nvGrpSpPr>
-      <p:grpSpPr>
-        <a:xfrm>
-          <a:off x="0" y="0"/>
-          <a:ext cx="0" cy="0"/>
-          <a:chOff x="0" y="0"/>
-          <a:chExt cx="0" cy="0"/>
-        </a:xfrm>
-      </p:grpSpPr>
-      <p:sp>
-        <p:nvSpPr>
-          <p:cNvPr id="6" name="Rectangle 5">
-            <a:extLst>
-              <a:ext uri="{FF2B5EF4-FFF2-40B4-BE49-F238E27FC236}">
-                <a16:creationId xmlns:a16="http://schemas.microsoft.com/office/drawing/2014/main" id="{3AD4A771-A089-5FF4-40E5-9DCCE08FD702}"/>
-              </a:ext>
-            </a:extLst>
-          </p:cNvPr>
-          <p:cNvSpPr/>
-          <p:nvPr/>
-        </p:nvSpPr>
-        <p:spPr>
-          <a:xfrm>
-            <a:off x="-158750" y="-177800"/>
-            <a:ext cx="12408259" cy="1419193"/>
-          </a:xfrm>
-          <a:prstGeom prst="rect">
-            <a:avLst/>
-          </a:prstGeom>
-          <a:solidFill>
-            <a:srgbClr val="23B7DF"/>
-          </a:solidFill>
-          <a:ln>
-            <a:noFill/>
-          </a:ln>
-        </p:spPr>
-        <p:style>
-          <a:lnRef idx="2">
-            <a:schemeClr val="accent1">
-              <a:shade val="15000"/>
-            </a:schemeClr>
-          </a:lnRef>
-          <a:fillRef idx="1">
-            <a:schemeClr val="accent1"/>
-          </a:fillRef>
-          <a:effectRef idx="0">
-            <a:schemeClr val="accent1"/>
-          </a:effectRef>
-          <a:fontRef idx="minor">
-            <a:schemeClr val="lt1"/>
-          </a:fontRef>
-        </p:style>
-        <p:txBody>
-          <a:bodyPr rtlCol="0" anchor="ctr"/>
-          <a:lstStyle/>
-          <a:p>
-            <a:pPr algn="ctr"/>
-            <a:endParaRPr lang="de-DE" dirty="0"/>
-          </a:p>
-        </p:txBody>
-      </p:sp>
-      <p:pic>
-        <p:nvPicPr>
-          <p:cNvPr id="5" name="Picture 4" descr="SWIss DRG&#10;&#10;AI-generated content may be incorrect.">
-            <a:extLst>
-              <a:ext uri="{FF2B5EF4-FFF2-40B4-BE49-F238E27FC236}">
-                <a16:creationId xmlns:a16="http://schemas.microsoft.com/office/drawing/2014/main" id="{51323BE7-291A-2EE7-1782-1C046DC6D39E}"/>
-              </a:ext>
-            </a:extLst>
-          </p:cNvPr>
-          <p:cNvPicPr>
-            <a:picLocks noChangeAspect="1"/>
-          </p:cNvPicPr>
-          <p:nvPr/>
-        </p:nvPicPr>
-        <p:blipFill>
-          <a:blip r:embed="rId3"/>
-          <a:stretch>
-            <a:fillRect/>
-          </a:stretch>
-        </p:blipFill>
-        <p:spPr>
-          <a:xfrm>
-            <a:off x="0" y="520571"/>
-            <a:ext cx="3657600" cy="720822"/>
-          </a:xfrm>
-          <a:prstGeom prst="rect">
-            <a:avLst/>
-          </a:prstGeom>
-        </p:spPr>
-      </p:pic>
-      <p:sp>
-        <p:nvSpPr>
-          <p:cNvPr id="32" name="Freeform: Shape 31">
-            <a:extLst>
-              <a:ext uri="{FF2B5EF4-FFF2-40B4-BE49-F238E27FC236}">
-                <a16:creationId xmlns:a16="http://schemas.microsoft.com/office/drawing/2014/main" id="{4A6E8060-BA48-0E36-4332-367216BA7C5C}"/>
-              </a:ext>
-            </a:extLst>
-          </p:cNvPr>
-          <p:cNvSpPr/>
-          <p:nvPr/>
-        </p:nvSpPr>
-        <p:spPr>
-          <a:xfrm>
-            <a:off x="11375366" y="796696"/>
-            <a:ext cx="315636" cy="243028"/>
-          </a:xfrm>
-          <a:custGeom>
-            <a:avLst/>
-            <a:gdLst>
-              <a:gd name="csX0" fmla="*/ 74027 w 138371"/>
-              <a:gd name="csY0" fmla="*/ 88156 h 114621"/>
-              <a:gd name="csX1" fmla="*/ 28733 w 138371"/>
-              <a:gd name="csY1" fmla="*/ 114676 h 114621"/>
-              <a:gd name="csX2" fmla="*/ 4143 w 138371"/>
-              <a:gd name="csY2" fmla="*/ 94776 h 114621"/>
-              <a:gd name="csX3" fmla="*/ 7733 w 138371"/>
-              <a:gd name="csY3" fmla="*/ 73231 h 114621"/>
-              <a:gd name="csX4" fmla="*/ 21814 w 138371"/>
-              <a:gd name="csY4" fmla="*/ 8056 h 114621"/>
-              <a:gd name="csX5" fmla="*/ 9 w 138371"/>
-              <a:gd name="csY5" fmla="*/ 8056 h 114621"/>
-              <a:gd name="csX6" fmla="*/ 1935 w 138371"/>
-              <a:gd name="csY6" fmla="*/ 1161 h 114621"/>
-              <a:gd name="csX7" fmla="*/ 27351 w 138371"/>
-              <a:gd name="csY7" fmla="*/ 1161 h 114621"/>
-              <a:gd name="csX8" fmla="*/ 52745 w 138371"/>
-              <a:gd name="csY8" fmla="*/ 54 h 114621"/>
-              <a:gd name="csX9" fmla="*/ 35916 w 138371"/>
-              <a:gd name="csY9" fmla="*/ 71586 h 114621"/>
-              <a:gd name="csX10" fmla="*/ 31763 w 138371"/>
-              <a:gd name="csY10" fmla="*/ 94513 h 114621"/>
-              <a:gd name="csX11" fmla="*/ 43636 w 138371"/>
-              <a:gd name="csY11" fmla="*/ 103341 h 114621"/>
-              <a:gd name="csX12" fmla="*/ 58002 w 138371"/>
-              <a:gd name="csY12" fmla="*/ 97262 h 114621"/>
-              <a:gd name="csX13" fmla="*/ 79543 w 138371"/>
-              <a:gd name="csY13" fmla="*/ 60251 h 114621"/>
-              <a:gd name="csX14" fmla="*/ 93630 w 138371"/>
-              <a:gd name="csY14" fmla="*/ 1161 h 114621"/>
-              <a:gd name="csX15" fmla="*/ 122352 w 138371"/>
-              <a:gd name="csY15" fmla="*/ 1161 h 114621"/>
-              <a:gd name="csX16" fmla="*/ 103856 w 138371"/>
-              <a:gd name="csY16" fmla="*/ 82074 h 114621"/>
-              <a:gd name="csX17" fmla="*/ 101088 w 138371"/>
-              <a:gd name="csY17" fmla="*/ 98644 h 114621"/>
-              <a:gd name="csX18" fmla="*/ 106601 w 138371"/>
-              <a:gd name="csY18" fmla="*/ 103078 h 114621"/>
-              <a:gd name="csX19" fmla="*/ 132301 w 138371"/>
-              <a:gd name="csY19" fmla="*/ 72127 h 114621"/>
-              <a:gd name="csX20" fmla="*/ 138380 w 138371"/>
-              <a:gd name="csY20" fmla="*/ 75457 h 114621"/>
-              <a:gd name="csX21" fmla="*/ 94725 w 138371"/>
-              <a:gd name="csY21" fmla="*/ 114676 h 114621"/>
-              <a:gd name="csX22" fmla="*/ 74027 w 138371"/>
-              <a:gd name="csY22" fmla="*/ 88156 h 114621"/>
-            </a:gdLst>
-            <a:ahLst/>
-            <a:cxnLst>
-              <a:cxn ang="0">
-                <a:pos x="csX0" y="csY0"/>
-              </a:cxn>
-              <a:cxn ang="0">
-                <a:pos x="csX1" y="csY1"/>
-              </a:cxn>
-              <a:cxn ang="0">
-                <a:pos x="csX2" y="csY2"/>
-              </a:cxn>
-              <a:cxn ang="0">
-                <a:pos x="csX3" y="csY3"/>
-              </a:cxn>
-              <a:cxn ang="0">
-                <a:pos x="csX4" y="csY4"/>
-              </a:cxn>
-              <a:cxn ang="0">
-                <a:pos x="csX5" y="csY5"/>
-              </a:cxn>
-              <a:cxn ang="0">
-                <a:pos x="csX6" y="csY6"/>
-              </a:cxn>
-              <a:cxn ang="0">
-                <a:pos x="csX7" y="csY7"/>
-              </a:cxn>
-              <a:cxn ang="0">
-                <a:pos x="csX8" y="csY8"/>
-              </a:cxn>
-              <a:cxn ang="0">
-                <a:pos x="csX9" y="csY9"/>
-              </a:cxn>
-              <a:cxn ang="0">
-                <a:pos x="csX10" y="csY10"/>
-              </a:cxn>
-              <a:cxn ang="0">
-                <a:pos x="csX11" y="csY11"/>
-              </a:cxn>
-              <a:cxn ang="0">
-                <a:pos x="csX12" y="csY12"/>
-              </a:cxn>
-              <a:cxn ang="0">
-                <a:pos x="csX13" y="csY13"/>
-              </a:cxn>
-              <a:cxn ang="0">
-                <a:pos x="csX14" y="csY14"/>
-              </a:cxn>
-              <a:cxn ang="0">
-                <a:pos x="csX15" y="csY15"/>
-              </a:cxn>
-              <a:cxn ang="0">
-                <a:pos x="csX16" y="csY16"/>
-              </a:cxn>
-              <a:cxn ang="0">
-                <a:pos x="csX17" y="csY17"/>
-              </a:cxn>
-              <a:cxn ang="0">
-                <a:pos x="csX18" y="csY18"/>
-              </a:cxn>
-              <a:cxn ang="0">
-                <a:pos x="csX19" y="csY19"/>
-              </a:cxn>
-              <a:cxn ang="0">
-                <a:pos x="csX20" y="csY20"/>
-              </a:cxn>
-              <a:cxn ang="0">
-                <a:pos x="csX21" y="csY21"/>
-              </a:cxn>
-              <a:cxn ang="0">
-                <a:pos x="csX22" y="csY22"/>
-              </a:cxn>
-            </a:cxnLst>
-            <a:rect l="l" t="t" r="r" b="b"/>
-            <a:pathLst>
-              <a:path w="138371" h="114621">
-                <a:moveTo>
-                  <a:pt x="74027" y="88156"/>
-                </a:moveTo>
-                <a:cubicBezTo>
-                  <a:pt x="62154" y="103078"/>
-                  <a:pt x="48055" y="114676"/>
-                  <a:pt x="28733" y="114676"/>
-                </a:cubicBezTo>
-                <a:cubicBezTo>
-                  <a:pt x="15738" y="114676"/>
-                  <a:pt x="4143" y="110260"/>
-                  <a:pt x="4143" y="94776"/>
-                </a:cubicBezTo>
-                <a:cubicBezTo>
-                  <a:pt x="4143" y="90920"/>
-                  <a:pt x="5806" y="82074"/>
-                  <a:pt x="7733" y="73231"/>
-                </a:cubicBezTo>
-                <a:cubicBezTo>
-                  <a:pt x="7733" y="73231"/>
-                  <a:pt x="21814" y="8056"/>
-                  <a:pt x="21814" y="8056"/>
-                </a:cubicBezTo>
-                <a:cubicBezTo>
-                  <a:pt x="21814" y="8056"/>
-                  <a:pt x="9" y="8056"/>
-                  <a:pt x="9" y="8056"/>
-                </a:cubicBezTo>
-                <a:cubicBezTo>
-                  <a:pt x="9" y="8056"/>
-                  <a:pt x="1935" y="1161"/>
-                  <a:pt x="1935" y="1161"/>
-                </a:cubicBezTo>
-                <a:cubicBezTo>
-                  <a:pt x="1935" y="1161"/>
-                  <a:pt x="27351" y="1161"/>
-                  <a:pt x="27351" y="1161"/>
-                </a:cubicBezTo>
-                <a:cubicBezTo>
-                  <a:pt x="35916" y="1161"/>
-                  <a:pt x="44199" y="54"/>
-                  <a:pt x="52745" y="54"/>
-                </a:cubicBezTo>
-                <a:cubicBezTo>
-                  <a:pt x="52745" y="54"/>
-                  <a:pt x="35916" y="71586"/>
-                  <a:pt x="35916" y="71586"/>
-                </a:cubicBezTo>
-                <a:cubicBezTo>
-                  <a:pt x="33690" y="81533"/>
-                  <a:pt x="31763" y="90920"/>
-                  <a:pt x="31763" y="94513"/>
-                </a:cubicBezTo>
-                <a:cubicBezTo>
-                  <a:pt x="31763" y="101692"/>
-                  <a:pt x="38124" y="103341"/>
-                  <a:pt x="43636" y="103341"/>
-                </a:cubicBezTo>
-                <a:cubicBezTo>
-                  <a:pt x="48333" y="103341"/>
-                  <a:pt x="54134" y="99751"/>
-                  <a:pt x="58002" y="97262"/>
-                </a:cubicBezTo>
-                <a:cubicBezTo>
-                  <a:pt x="70438" y="89253"/>
-                  <a:pt x="76232" y="74072"/>
-                  <a:pt x="79543" y="60251"/>
-                </a:cubicBezTo>
-                <a:cubicBezTo>
-                  <a:pt x="79543" y="60251"/>
-                  <a:pt x="93630" y="1161"/>
-                  <a:pt x="93630" y="1161"/>
-                </a:cubicBezTo>
-                <a:cubicBezTo>
-                  <a:pt x="93630" y="1161"/>
-                  <a:pt x="122352" y="1161"/>
-                  <a:pt x="122352" y="1161"/>
-                </a:cubicBezTo>
-                <a:cubicBezTo>
-                  <a:pt x="122352" y="1161"/>
-                  <a:pt x="103856" y="82074"/>
-                  <a:pt x="103856" y="82074"/>
-                </a:cubicBezTo>
-                <a:cubicBezTo>
-                  <a:pt x="101914" y="90360"/>
-                  <a:pt x="100807" y="96718"/>
-                  <a:pt x="101088" y="98644"/>
-                </a:cubicBezTo>
-                <a:cubicBezTo>
-                  <a:pt x="101373" y="101414"/>
-                  <a:pt x="104140" y="103078"/>
-                  <a:pt x="106601" y="103078"/>
-                </a:cubicBezTo>
-                <a:cubicBezTo>
-                  <a:pt x="116557" y="103078"/>
-                  <a:pt x="128709" y="80148"/>
-                  <a:pt x="132301" y="72127"/>
-                </a:cubicBezTo>
-                <a:cubicBezTo>
-                  <a:pt x="132301" y="72127"/>
-                  <a:pt x="138380" y="75457"/>
-                  <a:pt x="138380" y="75457"/>
-                </a:cubicBezTo>
-                <a:cubicBezTo>
-                  <a:pt x="131201" y="93950"/>
-                  <a:pt x="116016" y="114676"/>
-                  <a:pt x="94725" y="114676"/>
-                </a:cubicBezTo>
-                <a:cubicBezTo>
-                  <a:pt x="78161" y="114676"/>
-                  <a:pt x="73749" y="104185"/>
-                  <a:pt x="74027" y="88156"/>
-                </a:cubicBezTo>
-              </a:path>
-            </a:pathLst>
-          </a:custGeom>
-          <a:solidFill>
-            <a:srgbClr val="161413"/>
-          </a:solidFill>
-          <a:ln w="3143" cap="flat">
-            <a:noFill/>
-            <a:prstDash val="solid"/>
-            <a:miter/>
-          </a:ln>
-        </p:spPr>
-        <p:txBody>
-          <a:bodyPr/>
-          <a:lstStyle/>
-          <a:p>
-            <a:endParaRPr lang="de-DE"/>
-          </a:p>
-        </p:txBody>
-      </p:sp>
-      <p:sp>
-        <p:nvSpPr>
-          <p:cNvPr id="33" name="Freeform: Shape 32">
-            <a:extLst>
-              <a:ext uri="{FF2B5EF4-FFF2-40B4-BE49-F238E27FC236}">
-                <a16:creationId xmlns:a16="http://schemas.microsoft.com/office/drawing/2014/main" id="{90149B68-E6E6-3C5E-819B-109B6A71CF98}"/>
-              </a:ext>
-            </a:extLst>
-          </p:cNvPr>
-          <p:cNvSpPr/>
-          <p:nvPr/>
-        </p:nvSpPr>
-        <p:spPr>
-          <a:xfrm>
-            <a:off x="11710898" y="632480"/>
-            <a:ext cx="99163" cy="156002"/>
-          </a:xfrm>
-          <a:custGeom>
-            <a:avLst/>
-            <a:gdLst>
-              <a:gd name="csX0" fmla="*/ 55 w 43472"/>
-              <a:gd name="csY0" fmla="*/ 72867 h 73576"/>
-              <a:gd name="csX1" fmla="*/ 9913 w 43472"/>
-              <a:gd name="csY1" fmla="*/ 29 h 73576"/>
-              <a:gd name="csX2" fmla="*/ 19096 w 43472"/>
-              <a:gd name="csY2" fmla="*/ 29 h 73576"/>
-              <a:gd name="csX3" fmla="*/ 15082 w 43472"/>
-              <a:gd name="csY3" fmla="*/ 28253 h 73576"/>
-              <a:gd name="csX4" fmla="*/ 15280 w 43472"/>
-              <a:gd name="csY4" fmla="*/ 28450 h 73576"/>
-              <a:gd name="csX5" fmla="*/ 26820 w 43472"/>
-              <a:gd name="csY5" fmla="*/ 23179 h 73576"/>
-              <a:gd name="csX6" fmla="*/ 43528 w 43472"/>
-              <a:gd name="csY6" fmla="*/ 44841 h 73576"/>
-              <a:gd name="csX7" fmla="*/ 12637 w 43472"/>
-              <a:gd name="csY7" fmla="*/ 73606 h 73576"/>
-              <a:gd name="csX8" fmla="*/ 55 w 43472"/>
-              <a:gd name="csY8" fmla="*/ 72867 h 73576"/>
-              <a:gd name="csX9" fmla="*/ 13920 w 43472"/>
-              <a:gd name="csY9" fmla="*/ 37022 h 73576"/>
-              <a:gd name="csX10" fmla="*/ 9789 w 43472"/>
-              <a:gd name="csY10" fmla="*/ 66203 h 73576"/>
-              <a:gd name="csX11" fmla="*/ 14764 w 43472"/>
-              <a:gd name="csY11" fmla="*/ 66203 h 73576"/>
-              <a:gd name="csX12" fmla="*/ 34317 w 43472"/>
-              <a:gd name="csY12" fmla="*/ 44643 h 73576"/>
-              <a:gd name="csX13" fmla="*/ 24074 w 43472"/>
-              <a:gd name="csY13" fmla="*/ 31001 h 73576"/>
-              <a:gd name="csX14" fmla="*/ 13920 w 43472"/>
-              <a:gd name="csY14" fmla="*/ 37022 h 73576"/>
-            </a:gdLst>
-            <a:ahLst/>
-            <a:cxnLst>
-              <a:cxn ang="0">
-                <a:pos x="csX0" y="csY0"/>
-              </a:cxn>
-              <a:cxn ang="0">
-                <a:pos x="csX1" y="csY1"/>
-              </a:cxn>
-              <a:cxn ang="0">
-                <a:pos x="csX2" y="csY2"/>
-              </a:cxn>
-              <a:cxn ang="0">
-                <a:pos x="csX3" y="csY3"/>
-              </a:cxn>
-              <a:cxn ang="0">
-                <a:pos x="csX4" y="csY4"/>
-              </a:cxn>
-              <a:cxn ang="0">
-                <a:pos x="csX5" y="csY5"/>
-              </a:cxn>
-              <a:cxn ang="0">
-                <a:pos x="csX6" y="csY6"/>
-              </a:cxn>
-              <a:cxn ang="0">
-                <a:pos x="csX7" y="csY7"/>
-              </a:cxn>
-              <a:cxn ang="0">
-                <a:pos x="csX8" y="csY8"/>
-              </a:cxn>
-              <a:cxn ang="0">
-                <a:pos x="csX9" y="csY9"/>
-              </a:cxn>
-              <a:cxn ang="0">
-                <a:pos x="csX10" y="csY10"/>
-              </a:cxn>
-              <a:cxn ang="0">
-                <a:pos x="csX11" y="csY11"/>
-              </a:cxn>
-              <a:cxn ang="0">
-                <a:pos x="csX12" y="csY12"/>
-              </a:cxn>
-              <a:cxn ang="0">
-                <a:pos x="csX13" y="csY13"/>
-              </a:cxn>
-              <a:cxn ang="0">
-                <a:pos x="csX14" y="csY14"/>
-              </a:cxn>
-            </a:cxnLst>
-            <a:rect l="l" t="t" r="r" b="b"/>
-            <a:pathLst>
-              <a:path w="43472" h="73576">
-                <a:moveTo>
-                  <a:pt x="55" y="72867"/>
-                </a:moveTo>
-                <a:cubicBezTo>
-                  <a:pt x="55" y="72867"/>
-                  <a:pt x="9913" y="29"/>
-                  <a:pt x="9913" y="29"/>
-                </a:cubicBezTo>
-                <a:cubicBezTo>
-                  <a:pt x="9913" y="29"/>
-                  <a:pt x="19096" y="29"/>
-                  <a:pt x="19096" y="29"/>
-                </a:cubicBezTo>
-                <a:cubicBezTo>
-                  <a:pt x="19096" y="29"/>
-                  <a:pt x="15082" y="28253"/>
-                  <a:pt x="15082" y="28253"/>
-                </a:cubicBezTo>
-                <a:cubicBezTo>
-                  <a:pt x="15082" y="28253"/>
-                  <a:pt x="15280" y="28450"/>
-                  <a:pt x="15280" y="28450"/>
-                </a:cubicBezTo>
-                <a:cubicBezTo>
-                  <a:pt x="19195" y="24542"/>
-                  <a:pt x="22364" y="23179"/>
-                  <a:pt x="26820" y="23179"/>
-                </a:cubicBezTo>
-                <a:cubicBezTo>
-                  <a:pt x="36745" y="23179"/>
-                  <a:pt x="43528" y="32062"/>
-                  <a:pt x="43528" y="44841"/>
-                </a:cubicBezTo>
-                <a:cubicBezTo>
-                  <a:pt x="43528" y="57540"/>
-                  <a:pt x="36547" y="73606"/>
-                  <a:pt x="12637" y="73606"/>
-                </a:cubicBezTo>
-                <a:cubicBezTo>
-                  <a:pt x="8104" y="73606"/>
-                  <a:pt x="2811" y="73287"/>
-                  <a:pt x="55" y="72867"/>
-                </a:cubicBezTo>
-                <a:close/>
-                <a:moveTo>
-                  <a:pt x="13920" y="37022"/>
-                </a:moveTo>
-                <a:cubicBezTo>
-                  <a:pt x="13920" y="37022"/>
-                  <a:pt x="9789" y="66203"/>
-                  <a:pt x="9789" y="66203"/>
-                </a:cubicBezTo>
-                <a:cubicBezTo>
-                  <a:pt x="9789" y="66203"/>
-                  <a:pt x="14764" y="66203"/>
-                  <a:pt x="14764" y="66203"/>
-                </a:cubicBezTo>
-                <a:cubicBezTo>
-                  <a:pt x="27243" y="66203"/>
-                  <a:pt x="34317" y="57441"/>
-                  <a:pt x="34317" y="44643"/>
-                </a:cubicBezTo>
-                <a:cubicBezTo>
-                  <a:pt x="34317" y="35973"/>
-                  <a:pt x="30412" y="31001"/>
-                  <a:pt x="24074" y="31001"/>
-                </a:cubicBezTo>
-                <a:cubicBezTo>
-                  <a:pt x="21102" y="31001"/>
-                  <a:pt x="14541" y="33008"/>
-                  <a:pt x="13920" y="37022"/>
-                </a:cubicBezTo>
-              </a:path>
-            </a:pathLst>
-          </a:custGeom>
-          <a:solidFill>
-            <a:srgbClr val="161413"/>
-          </a:solidFill>
-          <a:ln w="3143" cap="flat">
-            <a:noFill/>
-            <a:prstDash val="solid"/>
-            <a:miter/>
-          </a:ln>
-        </p:spPr>
-        <p:txBody>
-          <a:bodyPr/>
-          <a:lstStyle/>
-          <a:p>
-            <a:endParaRPr lang="de-DE"/>
-          </a:p>
-        </p:txBody>
-      </p:sp>
-      <p:sp>
-        <p:nvSpPr>
-          <p:cNvPr id="34" name="Freeform: Shape 33">
-            <a:extLst>
-              <a:ext uri="{FF2B5EF4-FFF2-40B4-BE49-F238E27FC236}">
-                <a16:creationId xmlns:a16="http://schemas.microsoft.com/office/drawing/2014/main" id="{632ABB16-B1CE-12A0-7EF2-9CDB85C243F9}"/>
-              </a:ext>
-            </a:extLst>
-          </p:cNvPr>
-          <p:cNvSpPr/>
-          <p:nvPr/>
-        </p:nvSpPr>
-        <p:spPr>
-          <a:xfrm>
-            <a:off x="10508484" y="787817"/>
-            <a:ext cx="1307392" cy="6713"/>
-          </a:xfrm>
-          <a:custGeom>
-            <a:avLst/>
-            <a:gdLst>
-              <a:gd name="csX0" fmla="*/ 9 w 573144"/>
-              <a:gd name="csY0" fmla="*/ 126 h 3166"/>
-              <a:gd name="csX1" fmla="*/ 573154 w 573144"/>
-              <a:gd name="csY1" fmla="*/ 126 h 3166"/>
-            </a:gdLst>
-            <a:ahLst/>
-            <a:cxnLst>
-              <a:cxn ang="0">
-                <a:pos x="csX0" y="csY0"/>
-              </a:cxn>
-              <a:cxn ang="0">
-                <a:pos x="csX1" y="csY1"/>
-              </a:cxn>
-            </a:cxnLst>
-            <a:rect l="l" t="t" r="r" b="b"/>
-            <a:pathLst>
-              <a:path w="573144" h="3166">
-                <a:moveTo>
-                  <a:pt x="9" y="126"/>
-                </a:moveTo>
-                <a:cubicBezTo>
-                  <a:pt x="9" y="126"/>
-                  <a:pt x="573154" y="126"/>
-                  <a:pt x="573154" y="126"/>
-                </a:cubicBezTo>
-              </a:path>
-            </a:pathLst>
-          </a:custGeom>
-          <a:noFill/>
-          <a:ln w="5656" cap="flat">
-            <a:noFill/>
-            <a:prstDash val="solid"/>
-            <a:miter/>
-          </a:ln>
-        </p:spPr>
-        <p:txBody>
-          <a:bodyPr/>
-          <a:lstStyle/>
-          <a:p>
-            <a:endParaRPr lang="de-DE"/>
-          </a:p>
-        </p:txBody>
-      </p:sp>
-      <p:sp>
-        <p:nvSpPr>
-          <p:cNvPr id="2" name="Title 1">
-            <a:extLst>
-              <a:ext uri="{FF2B5EF4-FFF2-40B4-BE49-F238E27FC236}">
-                <a16:creationId xmlns:a16="http://schemas.microsoft.com/office/drawing/2014/main" id="{008F62E7-5402-DAF7-688D-FAB5A710403F}"/>
-              </a:ext>
-            </a:extLst>
-          </p:cNvPr>
-          <p:cNvSpPr>
-            <a:spLocks noGrp="1"/>
-          </p:cNvSpPr>
-          <p:nvPr>
-            <p:ph type="ctrTitle"/>
-          </p:nvPr>
-        </p:nvSpPr>
-        <p:spPr>
-          <a:xfrm>
-            <a:off x="895038" y="427406"/>
-            <a:ext cx="5054421" cy="720822"/>
-          </a:xfrm>
-        </p:spPr>
-        <p:txBody>
-          <a:bodyPr>
-            <a:normAutofit fontScale="90000"/>
-          </a:bodyPr>
-          <a:lstStyle/>
-          <a:p>
-            <a:r>
-              <a:rPr lang="de-DE" dirty="0">
-                <a:solidFill>
-                  <a:schemeClr val="bg1"/>
-                </a:solidFill>
-                <a:highlight>
-                  <a:srgbClr val="23B7DF"/>
-                </a:highlight>
-              </a:rPr>
-              <a:t>Risikoanalyse</a:t>
-            </a:r>
-            <a:endParaRPr lang="de-DE" sz="4800" dirty="0">
-              <a:solidFill>
-                <a:schemeClr val="bg1"/>
-              </a:solidFill>
-              <a:highlight>
-                <a:srgbClr val="23B7DF"/>
-              </a:highlight>
-            </a:endParaRPr>
-          </a:p>
-        </p:txBody>
-      </p:sp>
-      <p:sp>
-        <p:nvSpPr>
-          <p:cNvPr id="3" name="TextBox 2">
-            <a:extLst>
-              <a:ext uri="{FF2B5EF4-FFF2-40B4-BE49-F238E27FC236}">
-                <a16:creationId xmlns:a16="http://schemas.microsoft.com/office/drawing/2014/main" id="{83D6B713-4D37-A340-F6BE-BCA271251AC3}"/>
-              </a:ext>
-            </a:extLst>
-          </p:cNvPr>
-          <p:cNvSpPr txBox="1"/>
-          <p:nvPr/>
-        </p:nvSpPr>
-        <p:spPr>
-          <a:xfrm>
-            <a:off x="424326" y="1394875"/>
-            <a:ext cx="10084158" cy="461665"/>
-          </a:xfrm>
-          <a:prstGeom prst="rect">
-            <a:avLst/>
-          </a:prstGeom>
-          <a:noFill/>
-        </p:spPr>
-        <p:txBody>
-          <a:bodyPr wrap="square" rtlCol="0">
-            <a:spAutoFit/>
-          </a:bodyPr>
-          <a:lstStyle/>
-          <a:p>
-            <a:r>
-              <a:rPr lang="de-DE" sz="2400" b="1" dirty="0"/>
-              <a:t>Problem</a:t>
-            </a:r>
-            <a:r>
-              <a:rPr lang="de-DE" sz="2400" dirty="0"/>
-              <a:t>: Wissenslücke in Programmiersprache/Umgebung</a:t>
-            </a:r>
-          </a:p>
-        </p:txBody>
-      </p:sp>
-      <p:sp>
-        <p:nvSpPr>
-          <p:cNvPr id="4" name="TextBox 3">
-            <a:extLst>
-              <a:ext uri="{FF2B5EF4-FFF2-40B4-BE49-F238E27FC236}">
-                <a16:creationId xmlns:a16="http://schemas.microsoft.com/office/drawing/2014/main" id="{D0FC83F1-22E8-2E52-EEF1-DC8F6F8B6CAB}"/>
-              </a:ext>
-            </a:extLst>
-          </p:cNvPr>
-          <p:cNvSpPr txBox="1"/>
-          <p:nvPr/>
-        </p:nvSpPr>
-        <p:spPr>
-          <a:xfrm>
-            <a:off x="424326" y="1831840"/>
-            <a:ext cx="10084158" cy="593047"/>
-          </a:xfrm>
-          <a:prstGeom prst="rect">
-            <a:avLst/>
-          </a:prstGeom>
-          <a:noFill/>
-        </p:spPr>
-        <p:txBody>
-          <a:bodyPr wrap="square" rtlCol="0">
-            <a:spAutoFit/>
-          </a:bodyPr>
-          <a:lstStyle/>
-          <a:p>
-            <a:pPr>
-              <a:lnSpc>
-                <a:spcPct val="150000"/>
-              </a:lnSpc>
-            </a:pPr>
-            <a:r>
-              <a:rPr lang="en-GB" sz="2400" b="1" dirty="0"/>
-              <a:t>Problem:</a:t>
-            </a:r>
-            <a:r>
-              <a:rPr lang="en-GB" sz="2400" dirty="0"/>
-              <a:t> </a:t>
-            </a:r>
-            <a:r>
-              <a:rPr lang="en-GB" sz="2400" dirty="0" err="1"/>
-              <a:t>Vage</a:t>
-            </a:r>
-            <a:r>
-              <a:rPr lang="en-GB" sz="2400" dirty="0"/>
-              <a:t> User Stories &amp; </a:t>
-            </a:r>
-            <a:r>
-              <a:rPr lang="en-GB" sz="2400" dirty="0" err="1"/>
-              <a:t>unklare</a:t>
-            </a:r>
-            <a:r>
-              <a:rPr lang="en-GB" sz="2400" dirty="0"/>
-              <a:t> </a:t>
-            </a:r>
-            <a:r>
-              <a:rPr lang="en-GB" sz="2400" dirty="0" err="1"/>
-              <a:t>Kundenanforderungen</a:t>
-            </a:r>
-            <a:r>
-              <a:rPr lang="en-GB" sz="2400" dirty="0"/>
-              <a:t>.</a:t>
-            </a:r>
-          </a:p>
-        </p:txBody>
-      </p:sp>
-      <p:sp>
-        <p:nvSpPr>
-          <p:cNvPr id="14" name="TextBox 13">
-            <a:extLst>
-              <a:ext uri="{FF2B5EF4-FFF2-40B4-BE49-F238E27FC236}">
-                <a16:creationId xmlns:a16="http://schemas.microsoft.com/office/drawing/2014/main" id="{4F2DCA8A-8DFA-87E8-8F6A-FCA8F44A3A28}"/>
-              </a:ext>
-            </a:extLst>
-          </p:cNvPr>
-          <p:cNvSpPr txBox="1"/>
-          <p:nvPr/>
-        </p:nvSpPr>
-        <p:spPr>
-          <a:xfrm>
-            <a:off x="392806" y="5260211"/>
-            <a:ext cx="11298196" cy="1077218"/>
-          </a:xfrm>
-          <a:prstGeom prst="rect">
-            <a:avLst/>
-          </a:prstGeom>
-          <a:noFill/>
-        </p:spPr>
-        <p:txBody>
-          <a:bodyPr wrap="square" rtlCol="0">
-            <a:spAutoFit/>
-          </a:bodyPr>
-          <a:lstStyle/>
-          <a:p>
-            <a:r>
-              <a:rPr lang="de-DE" sz="3200" b="1" dirty="0">
-                <a:solidFill>
-                  <a:schemeClr val="accent1">
-                    <a:lumMod val="60000"/>
-                    <a:lumOff val="40000"/>
-                  </a:schemeClr>
-                </a:solidFill>
-              </a:rPr>
-              <a:t>Einsicht: Immer die unbekannten Risiken problematisch</a:t>
-            </a:r>
-          </a:p>
-          <a:p>
-            <a:r>
-              <a:rPr lang="de-DE" sz="3200" b="1" dirty="0">
-                <a:solidFill>
-                  <a:schemeClr val="accent1">
-                    <a:lumMod val="60000"/>
-                    <a:lumOff val="40000"/>
-                  </a:schemeClr>
-                </a:solidFill>
-              </a:rPr>
-              <a:t>-&gt; Mehr Planen in Risiken</a:t>
-            </a:r>
-          </a:p>
-        </p:txBody>
-      </p:sp>
-      <p:sp>
-        <p:nvSpPr>
-          <p:cNvPr id="15" name="TextBox 14">
-            <a:extLst>
-              <a:ext uri="{FF2B5EF4-FFF2-40B4-BE49-F238E27FC236}">
-                <a16:creationId xmlns:a16="http://schemas.microsoft.com/office/drawing/2014/main" id="{79485E07-90DD-49E3-4AA6-0A76DCBA66BA}"/>
-              </a:ext>
-            </a:extLst>
-          </p:cNvPr>
-          <p:cNvSpPr txBox="1"/>
-          <p:nvPr/>
-        </p:nvSpPr>
-        <p:spPr>
-          <a:xfrm>
-            <a:off x="424326" y="2706892"/>
-            <a:ext cx="10084158" cy="593047"/>
-          </a:xfrm>
-          <a:prstGeom prst="rect">
-            <a:avLst/>
-          </a:prstGeom>
-          <a:noFill/>
-        </p:spPr>
-        <p:txBody>
-          <a:bodyPr wrap="square" rtlCol="0">
-            <a:spAutoFit/>
-          </a:bodyPr>
-          <a:lstStyle/>
-          <a:p>
-            <a:pPr>
-              <a:lnSpc>
-                <a:spcPct val="150000"/>
-              </a:lnSpc>
-            </a:pPr>
-            <a:r>
-              <a:rPr lang="de-DE" sz="2400" b="1" dirty="0"/>
-              <a:t>Massnahme:</a:t>
-            </a:r>
-            <a:r>
-              <a:rPr lang="de-DE" sz="2400" dirty="0"/>
-              <a:t> Eigenständiges Herunterbrechen in "Engineering Tasks".</a:t>
-            </a:r>
-          </a:p>
-        </p:txBody>
-      </p:sp>
-      <p:sp>
-        <p:nvSpPr>
-          <p:cNvPr id="16" name="TextBox 15">
-            <a:extLst>
-              <a:ext uri="{FF2B5EF4-FFF2-40B4-BE49-F238E27FC236}">
-                <a16:creationId xmlns:a16="http://schemas.microsoft.com/office/drawing/2014/main" id="{FAA8DA88-C852-A3FF-3061-F1994A99A170}"/>
-              </a:ext>
-            </a:extLst>
-          </p:cNvPr>
-          <p:cNvSpPr txBox="1"/>
-          <p:nvPr/>
-        </p:nvSpPr>
-        <p:spPr>
-          <a:xfrm>
-            <a:off x="508715" y="3728851"/>
-            <a:ext cx="10084158" cy="1147045"/>
-          </a:xfrm>
-          <a:prstGeom prst="rect">
-            <a:avLst/>
-          </a:prstGeom>
-          <a:noFill/>
-        </p:spPr>
-        <p:txBody>
-          <a:bodyPr wrap="square" rtlCol="0">
-            <a:spAutoFit/>
-          </a:bodyPr>
-          <a:lstStyle/>
-          <a:p>
-            <a:pPr>
-              <a:lnSpc>
-                <a:spcPct val="150000"/>
-              </a:lnSpc>
-            </a:pPr>
-            <a:r>
-              <a:rPr lang="de-DE" sz="2400" b="1" dirty="0"/>
-              <a:t>Lesson Learned:</a:t>
-            </a:r>
-            <a:r>
-              <a:rPr lang="de-DE" sz="2400" dirty="0"/>
-              <a:t> Gefahr von "Developer Bias" erkannt; künftig striktere Ausrichtung am Kundenwunsch.</a:t>
-            </a:r>
-          </a:p>
-        </p:txBody>
-      </p:sp>
-      <p:sp>
-        <p:nvSpPr>
-          <p:cNvPr id="7" name="TextBox 6">
-            <a:extLst>
-              <a:ext uri="{FF2B5EF4-FFF2-40B4-BE49-F238E27FC236}">
-                <a16:creationId xmlns:a16="http://schemas.microsoft.com/office/drawing/2014/main" id="{5078310B-CD8E-E206-348C-6C63371FE6D9}"/>
-              </a:ext>
-            </a:extLst>
-          </p:cNvPr>
-          <p:cNvSpPr txBox="1"/>
-          <p:nvPr/>
-        </p:nvSpPr>
-        <p:spPr>
-          <a:xfrm>
-            <a:off x="424326" y="1402928"/>
-            <a:ext cx="10084158" cy="461665"/>
-          </a:xfrm>
-          <a:prstGeom prst="rect">
-            <a:avLst/>
-          </a:prstGeom>
-          <a:noFill/>
-        </p:spPr>
-        <p:txBody>
-          <a:bodyPr wrap="square" rtlCol="0">
-            <a:spAutoFit/>
-          </a:bodyPr>
-          <a:lstStyle/>
-          <a:p>
-            <a:r>
-              <a:rPr lang="de-DE" sz="2400" b="1" strike="sngStrike" dirty="0">
-                <a:solidFill>
-                  <a:schemeClr val="bg2">
-                    <a:lumMod val="90000"/>
-                  </a:schemeClr>
-                </a:solidFill>
-              </a:rPr>
-              <a:t>Problem</a:t>
-            </a:r>
-            <a:r>
-              <a:rPr lang="de-DE" sz="2400" strike="sngStrike" dirty="0">
-                <a:solidFill>
-                  <a:schemeClr val="bg2">
-                    <a:lumMod val="90000"/>
-                  </a:schemeClr>
-                </a:solidFill>
-              </a:rPr>
-              <a:t>: Wissenslücke in Programmiersprache/Umgebung</a:t>
-            </a:r>
-          </a:p>
-        </p:txBody>
-      </p:sp>
-    </p:spTree>
-    <p:extLst>
-      <p:ext uri="{BB962C8B-B14F-4D97-AF65-F5344CB8AC3E}">
-        <p14:creationId xmlns:p14="http://schemas.microsoft.com/office/powerpoint/2010/main" val="2294690840"/>
-      </p:ext>
-    </p:extLst>
-  </p:cSld>
-  <p:clrMapOvr>
-    <a:masterClrMapping/>
-  </p:clrMapOvr>
-  <p:timing>
-    <p:tnLst>
-      <p:par>
-        <p:cTn id="1" dur="indefinite" restart="never" nodeType="tmRoot">
-          <p:childTnLst>
-            <p:seq concurrent="1" nextAc="seek">
-              <p:cTn id="2" dur="indefinite" nodeType="mainSeq">
-                <p:childTnLst>
-                  <p:par>
-                    <p:cTn id="3" fill="hold">
-                      <p:stCondLst>
-                        <p:cond delay="indefinite"/>
-                      </p:stCondLst>
-                      <p:childTnLst>
-                        <p:par>
-                          <p:cTn id="4" fill="hold">
-                            <p:stCondLst>
-                              <p:cond delay="0"/>
-                            </p:stCondLst>
-                            <p:childTnLst>
-                              <p:par>
-                                <p:cTn id="5" presetID="1" presetClass="entr" presetSubtype="0" fill="hold" grpId="0" nodeType="clickEffect">
-                                  <p:stCondLst>
-                                    <p:cond delay="0"/>
-                                  </p:stCondLst>
-                                  <p:childTnLst>
-                                    <p:set>
-                                      <p:cBhvr>
-                                        <p:cTn id="6" dur="1" fill="hold">
-                                          <p:stCondLst>
-                                            <p:cond delay="0"/>
-                                          </p:stCondLst>
-                                        </p:cTn>
-                                        <p:tgtEl>
-                                          <p:spTgt spid="3">
-                                            <p:txEl>
-                                              <p:pRg st="0" end="0"/>
-                                            </p:txEl>
-                                          </p:spTgt>
-                                        </p:tgtEl>
-                                        <p:attrNameLst>
-                                          <p:attrName>style.visibility</p:attrName>
-                                        </p:attrNameLst>
-                                      </p:cBhvr>
-                                      <p:to>
-                                        <p:strVal val="visible"/>
-                                      </p:to>
-                                    </p:set>
-                                  </p:childTnLst>
-                                </p:cTn>
-                              </p:par>
-                            </p:childTnLst>
-                          </p:cTn>
-                        </p:par>
-                      </p:childTnLst>
-                    </p:cTn>
-                  </p:par>
-                  <p:par>
-                    <p:cTn id="7" fill="hold">
-                      <p:stCondLst>
-                        <p:cond delay="indefinite"/>
-                      </p:stCondLst>
-                      <p:childTnLst>
-                        <p:par>
-                          <p:cTn id="8" fill="hold">
-                            <p:stCondLst>
-                              <p:cond delay="0"/>
-                            </p:stCondLst>
-                            <p:childTnLst>
-                              <p:par>
-                                <p:cTn id="9" presetID="1" presetClass="entr" presetSubtype="0" fill="hold" grpId="0" nodeType="clickEffect">
-                                  <p:stCondLst>
-                                    <p:cond delay="0"/>
-                                  </p:stCondLst>
-                                  <p:childTnLst>
-                                    <p:set>
-                                      <p:cBhvr>
-                                        <p:cTn id="10" dur="1" fill="hold">
-                                          <p:stCondLst>
-                                            <p:cond delay="0"/>
-                                          </p:stCondLst>
-                                        </p:cTn>
-                                        <p:tgtEl>
-                                          <p:spTgt spid="4"/>
-                                        </p:tgtEl>
-                                        <p:attrNameLst>
-                                          <p:attrName>style.visibility</p:attrName>
-                                        </p:attrNameLst>
-                                      </p:cBhvr>
-                                      <p:to>
-                                        <p:strVal val="visible"/>
-                                      </p:to>
-                                    </p:set>
-                                  </p:childTnLst>
-                                </p:cTn>
-                              </p:par>
-                              <p:par>
-                                <p:cTn id="11" presetID="1" presetClass="exit" presetSubtype="0" fill="hold" grpId="2" nodeType="withEffect">
-                                  <p:stCondLst>
-                                    <p:cond delay="0"/>
-                                  </p:stCondLst>
-                                  <p:childTnLst>
-                                    <p:set>
-                                      <p:cBhvr>
-                                        <p:cTn id="12" dur="1" fill="hold">
-                                          <p:stCondLst>
-                                            <p:cond delay="0"/>
-                                          </p:stCondLst>
-                                        </p:cTn>
-                                        <p:tgtEl>
-                                          <p:spTgt spid="3">
-                                            <p:txEl>
-                                              <p:pRg st="0" end="0"/>
-                                            </p:txEl>
-                                          </p:spTgt>
-                                        </p:tgtEl>
-                                        <p:attrNameLst>
-                                          <p:attrName>style.visibility</p:attrName>
-                                        </p:attrNameLst>
-                                      </p:cBhvr>
-                                      <p:to>
-                                        <p:strVal val="hidden"/>
-                                      </p:to>
-                                    </p:set>
-                                  </p:childTnLst>
-                                </p:cTn>
-                              </p:par>
-                              <p:par>
-                                <p:cTn id="13" presetID="1" presetClass="entr" presetSubtype="0" fill="hold" nodeType="withEffect">
-                                  <p:stCondLst>
-                                    <p:cond delay="0"/>
-                                  </p:stCondLst>
-                                  <p:childTnLst>
-                                    <p:set>
-                                      <p:cBhvr>
-                                        <p:cTn id="14" dur="1" fill="hold">
-                                          <p:stCondLst>
-                                            <p:cond delay="0"/>
-                                          </p:stCondLst>
-                                        </p:cTn>
-                                        <p:tgtEl>
-                                          <p:spTgt spid="7">
-                                            <p:txEl>
-                                              <p:pRg st="0" end="0"/>
-                                            </p:txEl>
-                                          </p:spTgt>
-                                        </p:tgtEl>
-                                        <p:attrNameLst>
-                                          <p:attrName>style.visibility</p:attrName>
-                                        </p:attrNameLst>
-                                      </p:cBhvr>
-                                      <p:to>
-                                        <p:strVal val="visible"/>
-                                      </p:to>
-                                    </p:set>
-                                  </p:childTnLst>
-                                </p:cTn>
-                              </p:par>
-                            </p:childTnLst>
-                          </p:cTn>
-                        </p:par>
-                      </p:childTnLst>
-                    </p:cTn>
-                  </p:par>
-                  <p:par>
-                    <p:cTn id="15" fill="hold">
-                      <p:stCondLst>
-                        <p:cond delay="indefinite"/>
-                      </p:stCondLst>
-                      <p:childTnLst>
-                        <p:par>
-                          <p:cTn id="16" fill="hold">
-                            <p:stCondLst>
-                              <p:cond delay="0"/>
-                            </p:stCondLst>
-                            <p:childTnLst>
-                              <p:par>
-                                <p:cTn id="17" presetID="1" presetClass="entr" presetSubtype="0" fill="hold" grpId="0" nodeType="clickEffect">
-                                  <p:stCondLst>
-                                    <p:cond delay="0"/>
-                                  </p:stCondLst>
-                                  <p:childTnLst>
-                                    <p:set>
-                                      <p:cBhvr>
-                                        <p:cTn id="18" dur="1" fill="hold">
-                                          <p:stCondLst>
-                                            <p:cond delay="0"/>
-                                          </p:stCondLst>
-                                        </p:cTn>
-                                        <p:tgtEl>
-                                          <p:spTgt spid="15"/>
-                                        </p:tgtEl>
-                                        <p:attrNameLst>
-                                          <p:attrName>style.visibility</p:attrName>
-                                        </p:attrNameLst>
-                                      </p:cBhvr>
-                                      <p:to>
-                                        <p:strVal val="visible"/>
-                                      </p:to>
-                                    </p:set>
-                                  </p:childTnLst>
-                                </p:cTn>
-                              </p:par>
-                            </p:childTnLst>
-                          </p:cTn>
-                        </p:par>
-                      </p:childTnLst>
-                    </p:cTn>
-                  </p:par>
-                  <p:par>
-                    <p:cTn id="19" fill="hold">
-                      <p:stCondLst>
-                        <p:cond delay="indefinite"/>
-                      </p:stCondLst>
-                      <p:childTnLst>
-                        <p:par>
-                          <p:cTn id="20" fill="hold">
-                            <p:stCondLst>
-                              <p:cond delay="0"/>
-                            </p:stCondLst>
-                            <p:childTnLst>
-                              <p:par>
-                                <p:cTn id="21" presetID="1" presetClass="entr" presetSubtype="0" fill="hold" nodeType="clickEffect">
-                                  <p:stCondLst>
-                                    <p:cond delay="0"/>
-                                  </p:stCondLst>
-                                  <p:childTnLst>
-                                    <p:set>
-                                      <p:cBhvr>
-                                        <p:cTn id="22" dur="1" fill="hold">
-                                          <p:stCondLst>
-                                            <p:cond delay="0"/>
-                                          </p:stCondLst>
-                                        </p:cTn>
-                                        <p:tgtEl>
-                                          <p:spTgt spid="16">
-                                            <p:txEl>
-                                              <p:pRg st="0" end="0"/>
-                                            </p:txEl>
-                                          </p:spTgt>
-                                        </p:tgtEl>
-                                        <p:attrNameLst>
-                                          <p:attrName>style.visibility</p:attrName>
-                                        </p:attrNameLst>
-                                      </p:cBhvr>
-                                      <p:to>
-                                        <p:strVal val="visible"/>
-                                      </p:to>
-                                    </p:set>
-                                  </p:childTnLst>
-                                </p:cTn>
-                              </p:par>
-                            </p:childTnLst>
-                          </p:cTn>
-                        </p:par>
-                      </p:childTnLst>
-                    </p:cTn>
-                  </p:par>
-                  <p:par>
-                    <p:cTn id="23" fill="hold">
-                      <p:stCondLst>
-                        <p:cond delay="indefinite"/>
-                      </p:stCondLst>
-                      <p:childTnLst>
-                        <p:par>
-                          <p:cTn id="24" fill="hold">
-                            <p:stCondLst>
-                              <p:cond delay="0"/>
-                            </p:stCondLst>
-                            <p:childTnLst>
-                              <p:par>
-                                <p:cTn id="25" presetID="1" presetClass="entr" presetSubtype="0" fill="hold" grpId="0" nodeType="clickEffect">
-                                  <p:stCondLst>
-                                    <p:cond delay="0"/>
-                                  </p:stCondLst>
-                                  <p:childTnLst>
-                                    <p:set>
-                                      <p:cBhvr>
-                                        <p:cTn id="26" dur="1" fill="hold">
-                                          <p:stCondLst>
-                                            <p:cond delay="0"/>
-                                          </p:stCondLst>
-                                        </p:cTn>
-                                        <p:tgtEl>
-                                          <p:spTgt spid="14"/>
-                                        </p:tgtEl>
-                                        <p:attrNameLst>
-                                          <p:attrName>style.visibility</p:attrName>
-                                        </p:attrNameLst>
-                                      </p:cBhvr>
-                                      <p:to>
-                                        <p:strVal val="visible"/>
-                                      </p:to>
-                                    </p:set>
-                                  </p:childTnLst>
-                                </p:cTn>
-                              </p:par>
-                              <p:par>
-                                <p:cTn id="27" presetID="1" presetClass="exit" presetSubtype="0" fill="hold" grpId="0" nodeType="withEffect">
-                                  <p:stCondLst>
-                                    <p:cond delay="0"/>
-                                  </p:stCondLst>
-                                  <p:childTnLst>
-                                    <p:set>
-                                      <p:cBhvr>
-                                        <p:cTn id="28" dur="1" fill="hold">
-                                          <p:stCondLst>
-                                            <p:cond delay="0"/>
-                                          </p:stCondLst>
-                                        </p:cTn>
-                                        <p:tgtEl>
-                                          <p:spTgt spid="7"/>
-                                        </p:tgtEl>
-                                        <p:attrNameLst>
-                                          <p:attrName>style.visibility</p:attrName>
-                                        </p:attrNameLst>
-                                      </p:cBhvr>
-                                      <p:to>
-                                        <p:strVal val="hidden"/>
-                                      </p:to>
-                                    </p:set>
-                                  </p:childTnLst>
-                                </p:cTn>
-                              </p:par>
-                            </p:childTnLst>
-                          </p:cTn>
-                        </p:par>
-                      </p:childTnLst>
-                    </p:cTn>
-                  </p:par>
-                </p:childTnLst>
-              </p:cTn>
-              <p:prevCondLst>
-                <p:cond evt="onPrev" delay="0">
-                  <p:tgtEl>
-                    <p:sldTgt/>
-                  </p:tgtEl>
-                </p:cond>
-              </p:prevCondLst>
-              <p:nextCondLst>
-                <p:cond evt="onNext" delay="0">
-                  <p:tgtEl>
-                    <p:sldTgt/>
-                  </p:tgtEl>
-                </p:cond>
-              </p:nextCondLst>
-            </p:seq>
-          </p:childTnLst>
-        </p:cTn>
-      </p:par>
-    </p:tnLst>
-    <p:bldLst>
-      <p:bldP spid="3" grpId="0" build="allAtOnce"/>
-      <p:bldP spid="3" grpId="2" build="allAtOnce"/>
-      <p:bldP spid="4" grpId="0"/>
-      <p:bldP spid="14" grpId="0"/>
-      <p:bldP spid="15" grpId="0"/>
-      <p:bldP spid="7" grpId="0"/>
-    </p:bldLst>
-  </p:timing>
-</p:sld>
-</file>
-
-<file path=ppt/slides/slide7.xml><?xml version="1.0" encoding="utf-8"?>
+<file path=ppt/slides/slide4.xml><?xml version="1.0" encoding="utf-8"?>
 <p:sld xmlns:a="http://schemas.openxmlformats.org/drawingml/2006/main" xmlns:r="http://schemas.openxmlformats.org/officeDocument/2006/relationships" xmlns:p="http://schemas.openxmlformats.org/presentationml/2006/main">
   <p:cSld>
     <p:spTree>
@@ -14162,7 +9605,7 @@
 </p:sld>
 </file>
 
-<file path=ppt/slides/slide8.xml><?xml version="1.0" encoding="utf-8"?>
+<file path=ppt/slides/slide5.xml><?xml version="1.0" encoding="utf-8"?>
 <p:sld xmlns:a="http://schemas.openxmlformats.org/drawingml/2006/main" xmlns:r="http://schemas.openxmlformats.org/officeDocument/2006/relationships" xmlns:p="http://schemas.openxmlformats.org/presentationml/2006/main">
   <p:cSld>
     <p:spTree>
